--- a/ADG/_실측판/16장/16장_역할전환과이후운영.pptx
+++ b/ADG/_실측판/16장/16장_역할전환과이후운영.pptx
@@ -6114,7 +6114,35 @@
                 </a:solidFill>
                 <a:latin typeface="맑은 고딕"/>
               </a:rPr>
-              <a:t>•  `Ready for Switchover: Yes` 가 **진행 신호**</a:t>
+              <a:t>•  </a:t>
+            </a:r>
+            <a:r>
+              <a:rPr sz="1700" b="0">
+                <a:solidFill>
+                  <a:srgbClr val="222222"/>
+                </a:solidFill>
+                <a:latin typeface="Consolas"/>
+                <a:cs typeface="Consolas"/>
+              </a:rPr>
+              <a:t>Ready for Switchover: Yes</a:t>
+            </a:r>
+            <a:r>
+              <a:rPr sz="1700" b="0">
+                <a:solidFill>
+                  <a:srgbClr val="222222"/>
+                </a:solidFill>
+                <a:latin typeface="맑은 고딕"/>
+              </a:rPr>
+              <a:t> 가 </a:t>
+            </a:r>
+            <a:r>
+              <a:rPr sz="1700" b="1">
+                <a:solidFill>
+                  <a:srgbClr val="222222"/>
+                </a:solidFill>
+                <a:latin typeface="맑은 고딕"/>
+              </a:rPr>
+              <a:t>진행 신호</a:t>
             </a:r>
           </a:p>
           <a:p>
@@ -6130,7 +6158,26 @@
                 </a:solidFill>
                 <a:latin typeface="맑은 고딕"/>
               </a:rPr>
-              <a:t>•  `static connect identifier` 검사 — 전환 과정과 직결</a:t>
+              <a:t>•  </a:t>
+            </a:r>
+            <a:r>
+              <a:rPr sz="1700" b="0">
+                <a:solidFill>
+                  <a:srgbClr val="222222"/>
+                </a:solidFill>
+                <a:latin typeface="Consolas"/>
+                <a:cs typeface="Consolas"/>
+              </a:rPr>
+              <a:t>static connect identifier</a:t>
+            </a:r>
+            <a:r>
+              <a:rPr sz="1700" b="0">
+                <a:solidFill>
+                  <a:srgbClr val="222222"/>
+                </a:solidFill>
+                <a:latin typeface="맑은 고딕"/>
+              </a:rPr>
+              <a:t> 검사 — 전환 과정과 직결</a:t>
             </a:r>
           </a:p>
           <a:p>
@@ -6146,7 +6193,45 @@
                 </a:solidFill>
                 <a:latin typeface="맑은 고딕"/>
               </a:rPr>
-              <a:t>•  `Log Files Cleared` / `Future` 구성</a:t>
+              <a:t>•  </a:t>
+            </a:r>
+            <a:r>
+              <a:rPr sz="1700" b="0">
+                <a:solidFill>
+                  <a:srgbClr val="222222"/>
+                </a:solidFill>
+                <a:latin typeface="Consolas"/>
+                <a:cs typeface="Consolas"/>
+              </a:rPr>
+              <a:t>Log Files Cleared</a:t>
+            </a:r>
+            <a:r>
+              <a:rPr sz="1700" b="0">
+                <a:solidFill>
+                  <a:srgbClr val="222222"/>
+                </a:solidFill>
+                <a:latin typeface="맑은 고딕"/>
+              </a:rPr>
+              <a:t> / </a:t>
+            </a:r>
+            <a:r>
+              <a:rPr sz="1700" b="0">
+                <a:solidFill>
+                  <a:srgbClr val="222222"/>
+                </a:solidFill>
+                <a:latin typeface="Consolas"/>
+                <a:cs typeface="Consolas"/>
+              </a:rPr>
+              <a:t>Future</a:t>
+            </a:r>
+            <a:r>
+              <a:rPr sz="1700" b="0">
+                <a:solidFill>
+                  <a:srgbClr val="222222"/>
+                </a:solidFill>
+                <a:latin typeface="맑은 고딕"/>
+              </a:rPr>
+              <a:t> 구성</a:t>
             </a:r>
           </a:p>
           <a:p>
@@ -6162,7 +6247,26 @@
                 </a:solidFill>
                 <a:latin typeface="맑은 고딕"/>
               </a:rPr>
-              <a:t>•  14장에서 `No` 가 되는 두 상황을 만들어 봤다</a:t>
+              <a:t>•  14장에서 </a:t>
+            </a:r>
+            <a:r>
+              <a:rPr sz="1700" b="0">
+                <a:solidFill>
+                  <a:srgbClr val="222222"/>
+                </a:solidFill>
+                <a:latin typeface="Consolas"/>
+                <a:cs typeface="Consolas"/>
+              </a:rPr>
+              <a:t>No</a:t>
+            </a:r>
+            <a:r>
+              <a:rPr sz="1700" b="0">
+                <a:solidFill>
+                  <a:srgbClr val="222222"/>
+                </a:solidFill>
+                <a:latin typeface="맑은 고딕"/>
+              </a:rPr>
+              <a:t> 가 되는 두 상황을 만들어 봤다</a:t>
             </a:r>
           </a:p>
         </p:txBody>
@@ -6580,7 +6684,17 @@
                 </a:solidFill>
                 <a:latin typeface="맑은 고딕"/>
               </a:rPr>
-              <a:t>•  `switchover to 'boston'`</a:t>
+              <a:t>•  </a:t>
+            </a:r>
+            <a:r>
+              <a:rPr sz="1700" b="0">
+                <a:solidFill>
+                  <a:srgbClr val="222222"/>
+                </a:solidFill>
+                <a:latin typeface="Consolas"/>
+                <a:cs typeface="Consolas"/>
+              </a:rPr>
+              <a:t>switchover to 'boston'</a:t>
             </a:r>
           </a:p>
           <a:p>
@@ -6596,7 +6710,17 @@
                 </a:solidFill>
                 <a:latin typeface="맑은 고딕"/>
               </a:rPr>
-              <a:t>•  `Performing switchover NOW, please wait...`</a:t>
+              <a:t>•  </a:t>
+            </a:r>
+            <a:r>
+              <a:rPr sz="1700" b="0">
+                <a:solidFill>
+                  <a:srgbClr val="222222"/>
+                </a:solidFill>
+                <a:latin typeface="Consolas"/>
+                <a:cs typeface="Consolas"/>
+              </a:rPr>
+              <a:t>Performing switchover NOW, please wait...</a:t>
             </a:r>
           </a:p>
           <a:p>
@@ -6612,7 +6736,17 @@
                 </a:solidFill>
                 <a:latin typeface="맑은 고딕"/>
               </a:rPr>
-              <a:t>•  `New primary database "boston" is opening...`</a:t>
+              <a:t>•  </a:t>
+            </a:r>
+            <a:r>
+              <a:rPr sz="1700" b="0">
+                <a:solidFill>
+                  <a:srgbClr val="222222"/>
+                </a:solidFill>
+                <a:latin typeface="Consolas"/>
+                <a:cs typeface="Consolas"/>
+              </a:rPr>
+              <a:t>New primary database "boston" is opening...</a:t>
             </a:r>
           </a:p>
           <a:p>
@@ -6628,7 +6762,17 @@
                 </a:solidFill>
                 <a:latin typeface="맑은 고딕"/>
               </a:rPr>
-              <a:t>•  `Operation requires start up of instance "chicago"`</a:t>
+              <a:t>•  </a:t>
+            </a:r>
+            <a:r>
+              <a:rPr sz="1700" b="0">
+                <a:solidFill>
+                  <a:srgbClr val="222222"/>
+                </a:solidFill>
+                <a:latin typeface="Consolas"/>
+                <a:cs typeface="Consolas"/>
+              </a:rPr>
+              <a:t>Operation requires start up of instance "chicago"</a:t>
             </a:r>
           </a:p>
           <a:p>
@@ -6644,7 +6788,17 @@
                 </a:solidFill>
                 <a:latin typeface="맑은 고딕"/>
               </a:rPr>
-              <a:t>•  `Switchover succeeded, new primary is "boston"`</a:t>
+              <a:t>•  </a:t>
+            </a:r>
+            <a:r>
+              <a:rPr sz="1700" b="0">
+                <a:solidFill>
+                  <a:srgbClr val="222222"/>
+                </a:solidFill>
+                <a:latin typeface="Consolas"/>
+                <a:cs typeface="Consolas"/>
+              </a:rPr>
+              <a:t>Switchover succeeded, new primary is "boston"</a:t>
             </a:r>
           </a:p>
         </p:txBody>
@@ -6823,7 +6977,16 @@
                 </a:solidFill>
                 <a:latin typeface="맑은 고딕"/>
               </a:rPr>
-              <a:t>•  옛 Primary 는 전환 중 **한 번 내려간다**</a:t>
+              <a:t>•  옛 Primary 는 전환 중 </a:t>
+            </a:r>
+            <a:r>
+              <a:rPr sz="1700" b="1">
+                <a:solidFill>
+                  <a:srgbClr val="222222"/>
+                </a:solidFill>
+                <a:latin typeface="맑은 고딕"/>
+              </a:rPr>
+              <a:t>한 번 내려간다</a:t>
             </a:r>
           </a:p>
           <a:p>
@@ -6839,7 +7002,16 @@
                 </a:solidFill>
                 <a:latin typeface="맑은 고딕"/>
               </a:rPr>
-              <a:t>•  내려간 인스턴스에는 **동적 등록이 없다**</a:t>
+              <a:t>•  내려간 인스턴스에는 </a:t>
+            </a:r>
+            <a:r>
+              <a:rPr sz="1700" b="1">
+                <a:solidFill>
+                  <a:srgbClr val="222222"/>
+                </a:solidFill>
+                <a:latin typeface="맑은 고딕"/>
+              </a:rPr>
+              <a:t>동적 등록이 없다</a:t>
             </a:r>
           </a:p>
           <a:p>
@@ -6855,7 +7027,44 @@
                 </a:solidFill>
                 <a:latin typeface="맑은 고딕"/>
               </a:rPr>
-              <a:t>•  그래서 `listener.ora` 의 **정적 등록**이 필요하다</a:t>
+              <a:t>•  그래서 </a:t>
+            </a:r>
+            <a:r>
+              <a:rPr sz="1700" b="0">
+                <a:solidFill>
+                  <a:srgbClr val="222222"/>
+                </a:solidFill>
+                <a:latin typeface="Consolas"/>
+                <a:cs typeface="Consolas"/>
+              </a:rPr>
+              <a:t>listener.ora</a:t>
+            </a:r>
+            <a:r>
+              <a:rPr sz="1700" b="0">
+                <a:solidFill>
+                  <a:srgbClr val="222222"/>
+                </a:solidFill>
+                <a:latin typeface="맑은 고딕"/>
+              </a:rPr>
+              <a:t> 의 </a:t>
+            </a:r>
+            <a:r>
+              <a:rPr sz="1700" b="1">
+                <a:solidFill>
+                  <a:srgbClr val="222222"/>
+                </a:solidFill>
+                <a:latin typeface="맑은 고딕"/>
+              </a:rPr>
+              <a:t>정적 등록</a:t>
+            </a:r>
+            <a:r>
+              <a:rPr sz="1700" b="0">
+                <a:solidFill>
+                  <a:srgbClr val="222222"/>
+                </a:solidFill>
+                <a:latin typeface="맑은 고딕"/>
+              </a:rPr>
+              <a:t>이 필요하다</a:t>
             </a:r>
           </a:p>
           <a:p>
@@ -6871,7 +7080,35 @@
                 </a:solidFill>
                 <a:latin typeface="맑은 고딕"/>
               </a:rPr>
-              <a:t>•  없으면 `New primary ... is opening` **다음에서 멈춘다**</a:t>
+              <a:t>•  없으면 </a:t>
+            </a:r>
+            <a:r>
+              <a:rPr sz="1700" b="0">
+                <a:solidFill>
+                  <a:srgbClr val="222222"/>
+                </a:solidFill>
+                <a:latin typeface="Consolas"/>
+                <a:cs typeface="Consolas"/>
+              </a:rPr>
+              <a:t>New primary ... is opening</a:t>
+            </a:r>
+            <a:r>
+              <a:rPr sz="1700" b="0">
+                <a:solidFill>
+                  <a:srgbClr val="222222"/>
+                </a:solidFill>
+                <a:latin typeface="맑은 고딕"/>
+              </a:rPr>
+              <a:t> </a:t>
+            </a:r>
+            <a:r>
+              <a:rPr sz="1700" b="1">
+                <a:solidFill>
+                  <a:srgbClr val="222222"/>
+                </a:solidFill>
+                <a:latin typeface="맑은 고딕"/>
+              </a:rPr>
+              <a:t>다음에서 멈춘다</a:t>
             </a:r>
           </a:p>
         </p:txBody>
@@ -7050,7 +7287,16 @@
                 </a:solidFill>
                 <a:latin typeface="맑은 고딕"/>
               </a:rPr>
-              <a:t>•  새 Standby 가 마운트에서 그치지 않고 **열렸다**</a:t>
+              <a:t>•  새 Standby 가 마운트에서 그치지 않고 </a:t>
+            </a:r>
+            <a:r>
+              <a:rPr sz="1700" b="1">
+                <a:solidFill>
+                  <a:srgbClr val="222222"/>
+                </a:solidFill>
+                <a:latin typeface="맑은 고딕"/>
+              </a:rPr>
+              <a:t>열렸다</a:t>
             </a:r>
           </a:p>
           <a:p>
@@ -7066,7 +7312,17 @@
                 </a:solidFill>
                 <a:latin typeface="맑은 고딕"/>
               </a:rPr>
-              <a:t>•  `READ ONLY WITH APPLY`</a:t>
+              <a:t>•  </a:t>
+            </a:r>
+            <a:r>
+              <a:rPr sz="1700" b="0">
+                <a:solidFill>
+                  <a:srgbClr val="222222"/>
+                </a:solidFill>
+                <a:latin typeface="Consolas"/>
+                <a:cs typeface="Consolas"/>
+              </a:rPr>
+              <a:t>READ ONLY WITH APPLY</a:t>
             </a:r>
           </a:p>
           <a:p>
@@ -7082,7 +7338,25 @@
                 </a:solidFill>
                 <a:latin typeface="맑은 고딕"/>
               </a:rPr>
-              <a:t>•  MRP0 도 **자동으로 뜬다** (시퀀스 86)</a:t>
+              <a:t>•  MRP0 도 </a:t>
+            </a:r>
+            <a:r>
+              <a:rPr sz="1700" b="1">
+                <a:solidFill>
+                  <a:srgbClr val="222222"/>
+                </a:solidFill>
+                <a:latin typeface="맑은 고딕"/>
+              </a:rPr>
+              <a:t>자동으로 뜬다</a:t>
+            </a:r>
+            <a:r>
+              <a:rPr sz="1700" b="0">
+                <a:solidFill>
+                  <a:srgbClr val="222222"/>
+                </a:solidFill>
+                <a:latin typeface="맑은 고딕"/>
+              </a:rPr>
+              <a:t> (시퀀스 86)</a:t>
             </a:r>
           </a:p>
           <a:p>
@@ -7098,7 +7372,26 @@
                 </a:solidFill>
                 <a:latin typeface="맑은 고딕"/>
               </a:rPr>
-              <a:t>•  Broker 의 `Intended State` 가 역할과 함께 옮겨 갔다</a:t>
+              <a:t>•  Broker 의 </a:t>
+            </a:r>
+            <a:r>
+              <a:rPr sz="1700" b="0">
+                <a:solidFill>
+                  <a:srgbClr val="222222"/>
+                </a:solidFill>
+                <a:latin typeface="Consolas"/>
+                <a:cs typeface="Consolas"/>
+              </a:rPr>
+              <a:t>Intended State</a:t>
+            </a:r>
+            <a:r>
+              <a:rPr sz="1700" b="0">
+                <a:solidFill>
+                  <a:srgbClr val="222222"/>
+                </a:solidFill>
+                <a:latin typeface="맑은 고딕"/>
+              </a:rPr>
+              <a:t> 가 역할과 함께 옮겨 갔다</a:t>
             </a:r>
           </a:p>
         </p:txBody>
@@ -7516,7 +7809,36 @@
                 </a:solidFill>
                 <a:latin typeface="맑은 고딕"/>
               </a:rPr>
-              <a:t>•  `log_archive_dest_2` = **`service="chicago"`**</a:t>
+              <a:t>•  </a:t>
+            </a:r>
+            <a:r>
+              <a:rPr sz="1700" b="0">
+                <a:solidFill>
+                  <a:srgbClr val="222222"/>
+                </a:solidFill>
+                <a:latin typeface="Consolas"/>
+                <a:cs typeface="Consolas"/>
+              </a:rPr>
+              <a:t>log_archive_dest_2</a:t>
+            </a:r>
+            <a:r>
+              <a:rPr sz="1700" b="0">
+                <a:solidFill>
+                  <a:srgbClr val="222222"/>
+                </a:solidFill>
+                <a:latin typeface="맑은 고딕"/>
+              </a:rPr>
+              <a:t> = </a:t>
+            </a:r>
+            <a:r>
+              <a:rPr sz="1700" b="1">
+                <a:solidFill>
+                  <a:srgbClr val="222222"/>
+                </a:solidFill>
+                <a:latin typeface="Consolas"/>
+                <a:cs typeface="Consolas"/>
+              </a:rPr>
+              <a:t>service="chicago"</a:t>
             </a:r>
           </a:p>
           <a:p>
@@ -7532,7 +7854,36 @@
                 </a:solidFill>
                 <a:latin typeface="맑은 고딕"/>
               </a:rPr>
-              <a:t>•  `log_archive_dest_state_2` = `ENABLE`</a:t>
+              <a:t>•  </a:t>
+            </a:r>
+            <a:r>
+              <a:rPr sz="1700" b="0">
+                <a:solidFill>
+                  <a:srgbClr val="222222"/>
+                </a:solidFill>
+                <a:latin typeface="Consolas"/>
+                <a:cs typeface="Consolas"/>
+              </a:rPr>
+              <a:t>log_archive_dest_state_2</a:t>
+            </a:r>
+            <a:r>
+              <a:rPr sz="1700" b="0">
+                <a:solidFill>
+                  <a:srgbClr val="222222"/>
+                </a:solidFill>
+                <a:latin typeface="맑은 고딕"/>
+              </a:rPr>
+              <a:t> = </a:t>
+            </a:r>
+            <a:r>
+              <a:rPr sz="1700" b="0">
+                <a:solidFill>
+                  <a:srgbClr val="222222"/>
+                </a:solidFill>
+                <a:latin typeface="Consolas"/>
+                <a:cs typeface="Consolas"/>
+              </a:rPr>
+              <a:t>ENABLE</a:t>
             </a:r>
           </a:p>
           <a:p>
@@ -7548,7 +7899,35 @@
                 </a:solidFill>
                 <a:latin typeface="맑은 고딕"/>
               </a:rPr>
-              <a:t>•  `fal_server` = **(비어 있음)**</a:t>
+              <a:t>•  </a:t>
+            </a:r>
+            <a:r>
+              <a:rPr sz="1700" b="0">
+                <a:solidFill>
+                  <a:srgbClr val="222222"/>
+                </a:solidFill>
+                <a:latin typeface="Consolas"/>
+                <a:cs typeface="Consolas"/>
+              </a:rPr>
+              <a:t>fal_server</a:t>
+            </a:r>
+            <a:r>
+              <a:rPr sz="1700" b="0">
+                <a:solidFill>
+                  <a:srgbClr val="222222"/>
+                </a:solidFill>
+                <a:latin typeface="맑은 고딕"/>
+              </a:rPr>
+              <a:t> = </a:t>
+            </a:r>
+            <a:r>
+              <a:rPr sz="1700" b="1">
+                <a:solidFill>
+                  <a:srgbClr val="222222"/>
+                </a:solidFill>
+                <a:latin typeface="맑은 고딕"/>
+              </a:rPr>
+              <a:t>(비어 있음)</a:t>
             </a:r>
           </a:p>
           <a:p>
@@ -7564,7 +7943,36 @@
                 </a:solidFill>
                 <a:latin typeface="맑은 고딕"/>
               </a:rPr>
-              <a:t>•  `log_archive_config` = `dg_config=(chicago,boston,farsync)`</a:t>
+              <a:t>•  </a:t>
+            </a:r>
+            <a:r>
+              <a:rPr sz="1700" b="0">
+                <a:solidFill>
+                  <a:srgbClr val="222222"/>
+                </a:solidFill>
+                <a:latin typeface="Consolas"/>
+                <a:cs typeface="Consolas"/>
+              </a:rPr>
+              <a:t>log_archive_config</a:t>
+            </a:r>
+            <a:r>
+              <a:rPr sz="1700" b="0">
+                <a:solidFill>
+                  <a:srgbClr val="222222"/>
+                </a:solidFill>
+                <a:latin typeface="맑은 고딕"/>
+              </a:rPr>
+              <a:t> = </a:t>
+            </a:r>
+            <a:r>
+              <a:rPr sz="1700" b="0">
+                <a:solidFill>
+                  <a:srgbClr val="222222"/>
+                </a:solidFill>
+                <a:latin typeface="Consolas"/>
+                <a:cs typeface="Consolas"/>
+              </a:rPr>
+              <a:t>dg_config=(chicago,boston,farsync)</a:t>
             </a:r>
           </a:p>
         </p:txBody>
@@ -7743,7 +8151,35 @@
                 </a:solidFill>
                 <a:latin typeface="맑은 고딕"/>
               </a:rPr>
-              <a:t>•  `switchover to 'chicago'` — 실측 **69초**</a:t>
+              <a:t>•  </a:t>
+            </a:r>
+            <a:r>
+              <a:rPr sz="1700" b="0">
+                <a:solidFill>
+                  <a:srgbClr val="222222"/>
+                </a:solidFill>
+                <a:latin typeface="Consolas"/>
+                <a:cs typeface="Consolas"/>
+              </a:rPr>
+              <a:t>switchover to 'chicago'</a:t>
+            </a:r>
+            <a:r>
+              <a:rPr sz="1700" b="0">
+                <a:solidFill>
+                  <a:srgbClr val="222222"/>
+                </a:solidFill>
+                <a:latin typeface="맑은 고딕"/>
+              </a:rPr>
+              <a:t> — 실측 </a:t>
+            </a:r>
+            <a:r>
+              <a:rPr sz="1700" b="1">
+                <a:solidFill>
+                  <a:srgbClr val="222222"/>
+                </a:solidFill>
+                <a:latin typeface="맑은 고딕"/>
+              </a:rPr>
+              <a:t>69초</a:t>
             </a:r>
           </a:p>
           <a:p>
@@ -7759,7 +8195,17 @@
                 </a:solidFill>
                 <a:latin typeface="맑은 고딕"/>
               </a:rPr>
-              <a:t>•  이번에는 boston 쪽에 `Connected to an idle instance.`</a:t>
+              <a:t>•  이번에는 boston 쪽에 </a:t>
+            </a:r>
+            <a:r>
+              <a:rPr sz="1700" b="0">
+                <a:solidFill>
+                  <a:srgbClr val="222222"/>
+                </a:solidFill>
+                <a:latin typeface="Consolas"/>
+                <a:cs typeface="Consolas"/>
+              </a:rPr>
+              <a:t>Connected to an idle instance.</a:t>
             </a:r>
           </a:p>
           <a:p>
@@ -7775,7 +8221,16 @@
                 </a:solidFill>
                 <a:latin typeface="맑은 고딕"/>
               </a:rPr>
-              <a:t>•  데이터 — 전환 전(94)·후(95) **모두 유지**</a:t>
+              <a:t>•  데이터 — 전환 전(94)·후(95) </a:t>
+            </a:r>
+            <a:r>
+              <a:rPr sz="1700" b="1">
+                <a:solidFill>
+                  <a:srgbClr val="222222"/>
+                </a:solidFill>
+                <a:latin typeface="맑은 고딕"/>
+              </a:rPr>
+              <a:t>모두 유지</a:t>
             </a:r>
           </a:p>
           <a:p>
@@ -7791,7 +8246,16 @@
                 </a:solidFill>
                 <a:latin typeface="맑은 고딕"/>
               </a:rPr>
-              <a:t>•  **되돌리는 것까지가 훈련이다**</a:t>
+              <a:t>•  </a:t>
+            </a:r>
+            <a:r>
+              <a:rPr sz="1700" b="1">
+                <a:solidFill>
+                  <a:srgbClr val="222222"/>
+                </a:solidFill>
+                <a:latin typeface="맑은 고딕"/>
+              </a:rPr>
+              <a:t>되돌리는 것까지가 훈련이다</a:t>
             </a:r>
           </a:p>
         </p:txBody>
@@ -8209,7 +8673,26 @@
                 </a:solidFill>
                 <a:latin typeface="맑은 고딕"/>
               </a:rPr>
-              <a:t>•  없는 멤버 → **`Object "seattle" was not found`** (ORA- 없음)</a:t>
+              <a:t>•  없는 멤버 → </a:t>
+            </a:r>
+            <a:r>
+              <a:rPr sz="1700" b="1">
+                <a:solidFill>
+                  <a:srgbClr val="222222"/>
+                </a:solidFill>
+                <a:latin typeface="Consolas"/>
+                <a:cs typeface="Consolas"/>
+              </a:rPr>
+              <a:t>Object "seattle" was not found</a:t>
+            </a:r>
+            <a:r>
+              <a:rPr sz="1700" b="0">
+                <a:solidFill>
+                  <a:srgbClr val="222222"/>
+                </a:solidFill>
+                <a:latin typeface="맑은 고딕"/>
+              </a:rPr>
+              <a:t> (ORA- 없음)</a:t>
             </a:r>
           </a:p>
           <a:p>
@@ -8225,7 +8708,17 @@
                 </a:solidFill>
                 <a:latin typeface="맑은 고딕"/>
               </a:rPr>
-              <a:t>•  자기 자신 → **`ORA-16558`**</a:t>
+              <a:t>•  자기 자신 → </a:t>
+            </a:r>
+            <a:r>
+              <a:rPr sz="1700" b="1">
+                <a:solidFill>
+                  <a:srgbClr val="222222"/>
+                </a:solidFill>
+                <a:latin typeface="Consolas"/>
+                <a:cs typeface="Consolas"/>
+              </a:rPr>
+              <a:t>ORA-16558</a:t>
             </a:r>
           </a:p>
           <a:p>
@@ -8241,7 +8734,26 @@
                 </a:solidFill>
                 <a:latin typeface="맑은 고딕"/>
               </a:rPr>
-              <a:t>•  후자는 `Performing switchover NOW` 까지 출력한다</a:t>
+              <a:t>•  후자는 </a:t>
+            </a:r>
+            <a:r>
+              <a:rPr sz="1700" b="0">
+                <a:solidFill>
+                  <a:srgbClr val="222222"/>
+                </a:solidFill>
+                <a:latin typeface="Consolas"/>
+                <a:cs typeface="Consolas"/>
+              </a:rPr>
+              <a:t>Performing switchover NOW</a:t>
+            </a:r>
+            <a:r>
+              <a:rPr sz="1700" b="0">
+                <a:solidFill>
+                  <a:srgbClr val="222222"/>
+                </a:solidFill>
+                <a:latin typeface="맑은 고딕"/>
+              </a:rPr>
+              <a:t> 까지 출력한다</a:t>
             </a:r>
           </a:p>
           <a:p>
@@ -8257,7 +8769,17 @@
                 </a:solidFill>
                 <a:latin typeface="맑은 고딕"/>
               </a:rPr>
-              <a:t>•  그래도 `primary database is still "chicago"`</a:t>
+              <a:t>•  그래도 </a:t>
+            </a:r>
+            <a:r>
+              <a:rPr sz="1700" b="0">
+                <a:solidFill>
+                  <a:srgbClr val="222222"/>
+                </a:solidFill>
+                <a:latin typeface="Consolas"/>
+                <a:cs typeface="Consolas"/>
+              </a:rPr>
+              <a:t>primary database is still "chicago"</a:t>
             </a:r>
           </a:p>
         </p:txBody>
@@ -8413,7 +8935,26 @@
                 </a:solidFill>
                 <a:latin typeface="맑은 고딕"/>
               </a:rPr>
-              <a:t>•  `V$DATABASE.SWITCHOVER_STATUS` 를 역할별로 해석한다.</a:t>
+              <a:t>•  </a:t>
+            </a:r>
+            <a:r>
+              <a:rPr sz="1600" b="0">
+                <a:solidFill>
+                  <a:srgbClr val="222222"/>
+                </a:solidFill>
+                <a:latin typeface="Consolas"/>
+                <a:cs typeface="Consolas"/>
+              </a:rPr>
+              <a:t>V$DATABASE.SWITCHOVER_STATUS</a:t>
+            </a:r>
+            <a:r>
+              <a:rPr sz="1600" b="0">
+                <a:solidFill>
+                  <a:srgbClr val="222222"/>
+                </a:solidFill>
+                <a:latin typeface="맑은 고딕"/>
+              </a:rPr>
+              <a:t> 를 역할별로 해석한다.</a:t>
             </a:r>
           </a:p>
           <a:p>
@@ -8477,7 +9018,25 @@
                 </a:solidFill>
                 <a:latin typeface="맑은 고딕"/>
               </a:rPr>
-              <a:t>•  **Broker 환경에서 SQL 로 전환하면** 어떻게 되는지 실측으로 확인하고 복구한다.</a:t>
+              <a:t>•  </a:t>
+            </a:r>
+            <a:r>
+              <a:rPr sz="1600" b="1">
+                <a:solidFill>
+                  <a:srgbClr val="222222"/>
+                </a:solidFill>
+                <a:latin typeface="맑은 고딕"/>
+              </a:rPr>
+              <a:t>Broker 환경에서 SQL 로 전환하면</a:t>
+            </a:r>
+            <a:r>
+              <a:rPr sz="1600" b="0">
+                <a:solidFill>
+                  <a:srgbClr val="222222"/>
+                </a:solidFill>
+                <a:latin typeface="맑은 고딕"/>
+              </a:rPr>
+              <a:t> 어떻게 되는지 실측으로 확인하고 복구한다.</a:t>
             </a:r>
           </a:p>
           <a:p>
@@ -8493,7 +9052,26 @@
                 </a:solidFill>
                 <a:latin typeface="맑은 고딕"/>
               </a:rPr>
-              <a:t>•  플래시백을 켜고 Failover 후 `REINSTATE` 로 옛 Primary 를 되살린다.</a:t>
+              <a:t>•  플래시백을 켜고 Failover 후 </a:t>
+            </a:r>
+            <a:r>
+              <a:rPr sz="1600" b="0">
+                <a:solidFill>
+                  <a:srgbClr val="222222"/>
+                </a:solidFill>
+                <a:latin typeface="Consolas"/>
+                <a:cs typeface="Consolas"/>
+              </a:rPr>
+              <a:t>REINSTATE</a:t>
+            </a:r>
+            <a:r>
+              <a:rPr sz="1600" b="0">
+                <a:solidFill>
+                  <a:srgbClr val="222222"/>
+                </a:solidFill>
+                <a:latin typeface="맑은 고딕"/>
+              </a:rPr>
+              <a:t> 로 옛 Primary 를 되살린다.</a:t>
             </a:r>
           </a:p>
           <a:p>
@@ -8943,7 +9521,36 @@
                 </a:solidFill>
                 <a:latin typeface="맑은 고딕"/>
               </a:rPr>
-              <a:t>•  `ALTER DATABASE SWITCHOVER TO boston;` → **`Database altered.`**</a:t>
+              <a:t>•  </a:t>
+            </a:r>
+            <a:r>
+              <a:rPr sz="1700" b="0">
+                <a:solidFill>
+                  <a:srgbClr val="222222"/>
+                </a:solidFill>
+                <a:latin typeface="Consolas"/>
+                <a:cs typeface="Consolas"/>
+              </a:rPr>
+              <a:t>ALTER DATABASE SWITCHOVER TO boston;</a:t>
+            </a:r>
+            <a:r>
+              <a:rPr sz="1700" b="0">
+                <a:solidFill>
+                  <a:srgbClr val="222222"/>
+                </a:solidFill>
+                <a:latin typeface="맑은 고딕"/>
+              </a:rPr>
+              <a:t> → </a:t>
+            </a:r>
+            <a:r>
+              <a:rPr sz="1700" b="1">
+                <a:solidFill>
+                  <a:srgbClr val="222222"/>
+                </a:solidFill>
+                <a:latin typeface="Consolas"/>
+                <a:cs typeface="Consolas"/>
+              </a:rPr>
+              <a:t>Database altered.</a:t>
             </a:r>
           </a:p>
           <a:p>
@@ -8959,7 +9566,35 @@
                 </a:solidFill>
                 <a:latin typeface="맑은 고딕"/>
               </a:rPr>
-              <a:t>•  13장 보호 모드 변경 — `ORA-16627` 로 **거부**</a:t>
+              <a:t>•  13장 보호 모드 변경 — </a:t>
+            </a:r>
+            <a:r>
+              <a:rPr sz="1700" b="0">
+                <a:solidFill>
+                  <a:srgbClr val="222222"/>
+                </a:solidFill>
+                <a:latin typeface="Consolas"/>
+                <a:cs typeface="Consolas"/>
+              </a:rPr>
+              <a:t>ORA-16627</a:t>
+            </a:r>
+            <a:r>
+              <a:rPr sz="1700" b="0">
+                <a:solidFill>
+                  <a:srgbClr val="222222"/>
+                </a:solidFill>
+                <a:latin typeface="맑은 고딕"/>
+              </a:rPr>
+              <a:t> 로 </a:t>
+            </a:r>
+            <a:r>
+              <a:rPr sz="1700" b="1">
+                <a:solidFill>
+                  <a:srgbClr val="222222"/>
+                </a:solidFill>
+                <a:latin typeface="맑은 고딕"/>
+              </a:rPr>
+              <a:t>거부</a:t>
             </a:r>
           </a:p>
           <a:p>
@@ -8975,7 +9610,35 @@
                 </a:solidFill>
                 <a:latin typeface="맑은 고딕"/>
               </a:rPr>
-              <a:t>•  14장 FSFO 활성화 — `ORA-16827` **경고만**</a:t>
+              <a:t>•  14장 FSFO 활성화 — </a:t>
+            </a:r>
+            <a:r>
+              <a:rPr sz="1700" b="0">
+                <a:solidFill>
+                  <a:srgbClr val="222222"/>
+                </a:solidFill>
+                <a:latin typeface="Consolas"/>
+                <a:cs typeface="Consolas"/>
+              </a:rPr>
+              <a:t>ORA-16827</a:t>
+            </a:r>
+            <a:r>
+              <a:rPr sz="1700" b="0">
+                <a:solidFill>
+                  <a:srgbClr val="222222"/>
+                </a:solidFill>
+                <a:latin typeface="맑은 고딕"/>
+              </a:rPr>
+              <a:t> </a:t>
+            </a:r>
+            <a:r>
+              <a:rPr sz="1700" b="1">
+                <a:solidFill>
+                  <a:srgbClr val="222222"/>
+                </a:solidFill>
+                <a:latin typeface="맑은 고딕"/>
+              </a:rPr>
+              <a:t>경고만</a:t>
             </a:r>
           </a:p>
           <a:p>
@@ -8991,7 +9654,16 @@
                 </a:solidFill>
                 <a:latin typeface="맑은 고딕"/>
               </a:rPr>
-              <a:t>•  SQL 역할 전환 — **아무 말도 없다**</a:t>
+              <a:t>•  SQL 역할 전환 — </a:t>
+            </a:r>
+            <a:r>
+              <a:rPr sz="1700" b="1">
+                <a:solidFill>
+                  <a:srgbClr val="222222"/>
+                </a:solidFill>
+                <a:latin typeface="맑은 고딕"/>
+              </a:rPr>
+              <a:t>아무 말도 없다</a:t>
             </a:r>
           </a:p>
         </p:txBody>
@@ -9170,7 +9842,44 @@
                 </a:solidFill>
                 <a:latin typeface="맑은 고딕"/>
               </a:rPr>
-              <a:t>•  옛 Primary — **인스턴스가 내려간다** (`ORA-01034`)</a:t>
+              <a:t>•  옛 Primary — </a:t>
+            </a:r>
+            <a:r>
+              <a:rPr sz="1700" b="1">
+                <a:solidFill>
+                  <a:srgbClr val="222222"/>
+                </a:solidFill>
+                <a:latin typeface="맑은 고딕"/>
+              </a:rPr>
+              <a:t>인스턴스가 내려간다</a:t>
+            </a:r>
+            <a:r>
+              <a:rPr sz="1700" b="0">
+                <a:solidFill>
+                  <a:srgbClr val="222222"/>
+                </a:solidFill>
+                <a:latin typeface="맑은 고딕"/>
+              </a:rPr>
+              <a:t> (</a:t>
+            </a:r>
+            <a:r>
+              <a:rPr sz="1700" b="0">
+                <a:solidFill>
+                  <a:srgbClr val="222222"/>
+                </a:solidFill>
+                <a:latin typeface="Consolas"/>
+                <a:cs typeface="Consolas"/>
+              </a:rPr>
+              <a:t>ORA-01034</a:t>
+            </a:r>
+            <a:r>
+              <a:rPr sz="1700" b="0">
+                <a:solidFill>
+                  <a:srgbClr val="222222"/>
+                </a:solidFill>
+                <a:latin typeface="맑은 고딕"/>
+              </a:rPr>
+              <a:t>)</a:t>
             </a:r>
           </a:p>
           <a:p>
@@ -9186,7 +9895,26 @@
                 </a:solidFill>
                 <a:latin typeface="맑은 고딕"/>
               </a:rPr>
-              <a:t>•  새 Primary — **`MOUNTED`** 에 머문다</a:t>
+              <a:t>•  새 Primary — </a:t>
+            </a:r>
+            <a:r>
+              <a:rPr sz="1700" b="1">
+                <a:solidFill>
+                  <a:srgbClr val="222222"/>
+                </a:solidFill>
+                <a:latin typeface="Consolas"/>
+                <a:cs typeface="Consolas"/>
+              </a:rPr>
+              <a:t>MOUNTED</a:t>
+            </a:r>
+            <a:r>
+              <a:rPr sz="1700" b="0">
+                <a:solidFill>
+                  <a:srgbClr val="222222"/>
+                </a:solidFill>
+                <a:latin typeface="맑은 고딕"/>
+              </a:rPr>
+              <a:t> 에 머문다</a:t>
             </a:r>
           </a:p>
           <a:p>
@@ -9202,7 +9930,35 @@
                 </a:solidFill>
                 <a:latin typeface="맑은 고딕"/>
               </a:rPr>
-              <a:t>•  새 Primary 의 `log_archive_dest_2` — **비어 있다**</a:t>
+              <a:t>•  새 Primary 의 </a:t>
+            </a:r>
+            <a:r>
+              <a:rPr sz="1700" b="0">
+                <a:solidFill>
+                  <a:srgbClr val="222222"/>
+                </a:solidFill>
+                <a:latin typeface="Consolas"/>
+                <a:cs typeface="Consolas"/>
+              </a:rPr>
+              <a:t>log_archive_dest_2</a:t>
+            </a:r>
+            <a:r>
+              <a:rPr sz="1700" b="0">
+                <a:solidFill>
+                  <a:srgbClr val="222222"/>
+                </a:solidFill>
+                <a:latin typeface="맑은 고딕"/>
+              </a:rPr>
+              <a:t> — </a:t>
+            </a:r>
+            <a:r>
+              <a:rPr sz="1700" b="1">
+                <a:solidFill>
+                  <a:srgbClr val="222222"/>
+                </a:solidFill>
+                <a:latin typeface="맑은 고딕"/>
+              </a:rPr>
+              <a:t>비어 있다</a:t>
             </a:r>
           </a:p>
           <a:p>
@@ -9218,7 +9974,36 @@
                 </a:solidFill>
                 <a:latin typeface="맑은 고딕"/>
               </a:rPr>
-              <a:t>•  목적지 2번 `INACTIVE`, MRP 는 `WAIT_FOR_LOG`</a:t>
+              <a:t>•  목적지 2번 </a:t>
+            </a:r>
+            <a:r>
+              <a:rPr sz="1700" b="0">
+                <a:solidFill>
+                  <a:srgbClr val="222222"/>
+                </a:solidFill>
+                <a:latin typeface="Consolas"/>
+                <a:cs typeface="Consolas"/>
+              </a:rPr>
+              <a:t>INACTIVE</a:t>
+            </a:r>
+            <a:r>
+              <a:rPr sz="1700" b="0">
+                <a:solidFill>
+                  <a:srgbClr val="222222"/>
+                </a:solidFill>
+                <a:latin typeface="맑은 고딕"/>
+              </a:rPr>
+              <a:t>, MRP 는 </a:t>
+            </a:r>
+            <a:r>
+              <a:rPr sz="1700" b="0">
+                <a:solidFill>
+                  <a:srgbClr val="222222"/>
+                </a:solidFill>
+                <a:latin typeface="Consolas"/>
+                <a:cs typeface="Consolas"/>
+              </a:rPr>
+              <a:t>WAIT_FOR_LOG</a:t>
             </a:r>
           </a:p>
         </p:txBody>
@@ -9397,7 +10182,26 @@
                 </a:solidFill>
                 <a:latin typeface="맑은 고딕"/>
               </a:rPr>
-              <a:t>•  역할이 어긋난 직후 — **`SUCCESS`**, chicago 를 Primary 라고</a:t>
+              <a:t>•  역할이 어긋난 직후 — </a:t>
+            </a:r>
+            <a:r>
+              <a:rPr sz="1700" b="1">
+                <a:solidFill>
+                  <a:srgbClr val="222222"/>
+                </a:solidFill>
+                <a:latin typeface="Consolas"/>
+                <a:cs typeface="Consolas"/>
+              </a:rPr>
+              <a:t>SUCCESS</a:t>
+            </a:r>
+            <a:r>
+              <a:rPr sz="1700" b="0">
+                <a:solidFill>
+                  <a:srgbClr val="222222"/>
+                </a:solidFill>
+                <a:latin typeface="맑은 고딕"/>
+              </a:rPr>
+              <a:t>, chicago 를 Primary 라고</a:t>
             </a:r>
           </a:p>
           <a:p>
@@ -9413,7 +10217,26 @@
                 </a:solidFill>
                 <a:latin typeface="맑은 고딕"/>
               </a:rPr>
-              <a:t>•  `status updated 0 seconds ago` — 방금 계산한 값</a:t>
+              <a:t>•  </a:t>
+            </a:r>
+            <a:r>
+              <a:rPr sz="1700" b="0">
+                <a:solidFill>
+                  <a:srgbClr val="222222"/>
+                </a:solidFill>
+                <a:latin typeface="Consolas"/>
+                <a:cs typeface="Consolas"/>
+              </a:rPr>
+              <a:t>status updated 0 seconds ago</a:t>
+            </a:r>
+            <a:r>
+              <a:rPr sz="1700" b="0">
+                <a:solidFill>
+                  <a:srgbClr val="222222"/>
+                </a:solidFill>
+                <a:latin typeface="맑은 고딕"/>
+              </a:rPr>
+              <a:t> — 방금 계산한 값</a:t>
             </a:r>
           </a:p>
           <a:p>
@@ -9429,7 +10252,26 @@
                 </a:solidFill>
                 <a:latin typeface="맑은 고딕"/>
               </a:rPr>
-              <a:t>•  시간이 지나면 → **`ORA-16816: incorrect database role`** 양쪽</a:t>
+              <a:t>•  시간이 지나면 → </a:t>
+            </a:r>
+            <a:r>
+              <a:rPr sz="1700" b="1">
+                <a:solidFill>
+                  <a:srgbClr val="222222"/>
+                </a:solidFill>
+                <a:latin typeface="Consolas"/>
+                <a:cs typeface="Consolas"/>
+              </a:rPr>
+              <a:t>ORA-16816: incorrect database role</a:t>
+            </a:r>
+            <a:r>
+              <a:rPr sz="1700" b="0">
+                <a:solidFill>
+                  <a:srgbClr val="222222"/>
+                </a:solidFill>
+                <a:latin typeface="맑은 고딕"/>
+              </a:rPr>
+              <a:t> 양쪽</a:t>
             </a:r>
           </a:p>
           <a:p>
@@ -9445,7 +10287,17 @@
                 </a:solidFill>
                 <a:latin typeface="맑은 고딕"/>
               </a:rPr>
-              <a:t>•  SQL 로 되돌리려 하면 → **`ORA-16468`**</a:t>
+              <a:t>•  SQL 로 되돌리려 하면 → </a:t>
+            </a:r>
+            <a:r>
+              <a:rPr sz="1700" b="1">
+                <a:solidFill>
+                  <a:srgbClr val="222222"/>
+                </a:solidFill>
+                <a:latin typeface="Consolas"/>
+                <a:cs typeface="Consolas"/>
+              </a:rPr>
+              <a:t>ORA-16468</a:t>
             </a:r>
           </a:p>
         </p:txBody>
@@ -9624,7 +10476,17 @@
                 </a:solidFill>
                 <a:latin typeface="맑은 고딕"/>
               </a:rPr>
-              <a:t>•  `remove configuration;`</a:t>
+              <a:t>•  </a:t>
+            </a:r>
+            <a:r>
+              <a:rPr sz="1700" b="0">
+                <a:solidFill>
+                  <a:srgbClr val="222222"/>
+                </a:solidFill>
+                <a:latin typeface="Consolas"/>
+                <a:cs typeface="Consolas"/>
+              </a:rPr>
+              <a:t>remove configuration;</a:t>
             </a:r>
           </a:p>
           <a:p>
@@ -9640,7 +10502,17 @@
                 </a:solidFill>
                 <a:latin typeface="맑은 고딕"/>
               </a:rPr>
-              <a:t>•  `create configuration ... as primary database is 'boston' ...`</a:t>
+              <a:t>•  </a:t>
+            </a:r>
+            <a:r>
+              <a:rPr sz="1700" b="0">
+                <a:solidFill>
+                  <a:srgbClr val="222222"/>
+                </a:solidFill>
+                <a:latin typeface="Consolas"/>
+                <a:cs typeface="Consolas"/>
+              </a:rPr>
+              <a:t>create configuration ... as primary database is 'boston' ...</a:t>
             </a:r>
           </a:p>
           <a:p>
@@ -9656,7 +10528,36 @@
                 </a:solidFill>
                 <a:latin typeface="맑은 고딕"/>
               </a:rPr>
-              <a:t>•  `add database 'chicago' ...` → `enable configuration;`</a:t>
+              <a:t>•  </a:t>
+            </a:r>
+            <a:r>
+              <a:rPr sz="1700" b="0">
+                <a:solidFill>
+                  <a:srgbClr val="222222"/>
+                </a:solidFill>
+                <a:latin typeface="Consolas"/>
+                <a:cs typeface="Consolas"/>
+              </a:rPr>
+              <a:t>add database 'chicago' ...</a:t>
+            </a:r>
+            <a:r>
+              <a:rPr sz="1700" b="0">
+                <a:solidFill>
+                  <a:srgbClr val="222222"/>
+                </a:solidFill>
+                <a:latin typeface="맑은 고딕"/>
+              </a:rPr>
+              <a:t> → </a:t>
+            </a:r>
+            <a:r>
+              <a:rPr sz="1700" b="0">
+                <a:solidFill>
+                  <a:srgbClr val="222222"/>
+                </a:solidFill>
+                <a:latin typeface="Consolas"/>
+                <a:cs typeface="Consolas"/>
+              </a:rPr>
+              <a:t>enable configuration;</a:t>
             </a:r>
           </a:p>
           <a:p>
@@ -9672,7 +10573,26 @@
                 </a:solidFill>
                 <a:latin typeface="맑은 고딕"/>
               </a:rPr>
-              <a:t>•  그다음 `switchover to 'chicago'` 로 원래 역할 회복</a:t>
+              <a:t>•  그다음 </a:t>
+            </a:r>
+            <a:r>
+              <a:rPr sz="1700" b="0">
+                <a:solidFill>
+                  <a:srgbClr val="222222"/>
+                </a:solidFill>
+                <a:latin typeface="Consolas"/>
+                <a:cs typeface="Consolas"/>
+              </a:rPr>
+              <a:t>switchover to 'chicago'</a:t>
+            </a:r>
+            <a:r>
+              <a:rPr sz="1700" b="0">
+                <a:solidFill>
+                  <a:srgbClr val="222222"/>
+                </a:solidFill>
+                <a:latin typeface="맑은 고딕"/>
+              </a:rPr>
+              <a:t> 로 원래 역할 회복</a:t>
             </a:r>
           </a:p>
         </p:txBody>
@@ -10090,7 +11010,35 @@
                 </a:solidFill>
                 <a:latin typeface="맑은 고딕"/>
               </a:rPr>
-              <a:t>•  19c 는 **열린 채로** `ALTER DATABASE FLASHBACK ON`</a:t>
+              <a:t>•  19c 는 </a:t>
+            </a:r>
+            <a:r>
+              <a:rPr sz="1700" b="1">
+                <a:solidFill>
+                  <a:srgbClr val="222222"/>
+                </a:solidFill>
+                <a:latin typeface="맑은 고딕"/>
+              </a:rPr>
+              <a:t>열린 채로</a:t>
+            </a:r>
+            <a:r>
+              <a:rPr sz="1700" b="0">
+                <a:solidFill>
+                  <a:srgbClr val="222222"/>
+                </a:solidFill>
+                <a:latin typeface="맑은 고딕"/>
+              </a:rPr>
+              <a:t> </a:t>
+            </a:r>
+            <a:r>
+              <a:rPr sz="1700" b="0">
+                <a:solidFill>
+                  <a:srgbClr val="222222"/>
+                </a:solidFill>
+                <a:latin typeface="Consolas"/>
+                <a:cs typeface="Consolas"/>
+              </a:rPr>
+              <a:t>ALTER DATABASE FLASHBACK ON</a:t>
             </a:r>
           </a:p>
           <a:p>
@@ -10106,7 +11054,36 @@
                 </a:solidFill>
                 <a:latin typeface="맑은 고딕"/>
               </a:rPr>
-              <a:t>•  이미 켜져 있으면 **`ORA-38706` + `ORA-38713`**</a:t>
+              <a:t>•  이미 켜져 있으면 </a:t>
+            </a:r>
+            <a:r>
+              <a:rPr sz="1700" b="1">
+                <a:solidFill>
+                  <a:srgbClr val="222222"/>
+                </a:solidFill>
+                <a:latin typeface="Consolas"/>
+                <a:cs typeface="Consolas"/>
+              </a:rPr>
+              <a:t>ORA-38706</a:t>
+            </a:r>
+            <a:r>
+              <a:rPr sz="1700" b="1">
+                <a:solidFill>
+                  <a:srgbClr val="222222"/>
+                </a:solidFill>
+                <a:latin typeface="맑은 고딕"/>
+              </a:rPr>
+              <a:t> + </a:t>
+            </a:r>
+            <a:r>
+              <a:rPr sz="1700" b="1">
+                <a:solidFill>
+                  <a:srgbClr val="222222"/>
+                </a:solidFill>
+                <a:latin typeface="Consolas"/>
+                <a:cs typeface="Consolas"/>
+              </a:rPr>
+              <a:t>ORA-38713</a:t>
             </a:r>
           </a:p>
           <a:p>
@@ -10122,7 +11099,44 @@
                 </a:solidFill>
                 <a:latin typeface="맑은 고딕"/>
               </a:rPr>
-              <a:t>•  켜는 즉시 **200MB × 2** 의 `.flb` 파일</a:t>
+              <a:t>•  켜는 즉시 </a:t>
+            </a:r>
+            <a:r>
+              <a:rPr sz="1700" b="1">
+                <a:solidFill>
+                  <a:srgbClr val="222222"/>
+                </a:solidFill>
+                <a:latin typeface="맑은 고딕"/>
+              </a:rPr>
+              <a:t>200MB × 2</a:t>
+            </a:r>
+            <a:r>
+              <a:rPr sz="1700" b="0">
+                <a:solidFill>
+                  <a:srgbClr val="222222"/>
+                </a:solidFill>
+                <a:latin typeface="맑은 고딕"/>
+              </a:rPr>
+              <a:t> 의 </a:t>
+            </a:r>
+            <a:r>
+              <a:rPr sz="1700" b="0">
+                <a:solidFill>
+                  <a:srgbClr val="222222"/>
+                </a:solidFill>
+                <a:latin typeface="Consolas"/>
+                <a:cs typeface="Consolas"/>
+              </a:rPr>
+              <a:t>.flb</a:t>
+            </a:r>
+            <a:r>
+              <a:rPr sz="1700" b="0">
+                <a:solidFill>
+                  <a:srgbClr val="222222"/>
+                </a:solidFill>
+                <a:latin typeface="맑은 고딕"/>
+              </a:rPr>
+              <a:t> 파일</a:t>
             </a:r>
           </a:p>
           <a:p>
@@ -10317,7 +11331,26 @@
                 </a:solidFill>
                 <a:latin typeface="맑은 고딕"/>
               </a:rPr>
-              <a:t>•  `shutdown abort` — 재해를 흉내 낸다</a:t>
+              <a:t>•  </a:t>
+            </a:r>
+            <a:r>
+              <a:rPr sz="1700" b="0">
+                <a:solidFill>
+                  <a:srgbClr val="222222"/>
+                </a:solidFill>
+                <a:latin typeface="Consolas"/>
+                <a:cs typeface="Consolas"/>
+              </a:rPr>
+              <a:t>shutdown abort</a:t>
+            </a:r>
+            <a:r>
+              <a:rPr sz="1700" b="0">
+                <a:solidFill>
+                  <a:srgbClr val="222222"/>
+                </a:solidFill>
+                <a:latin typeface="맑은 고딕"/>
+              </a:rPr>
+              <a:t> — 재해를 흉내 낸다</a:t>
             </a:r>
           </a:p>
           <a:p>
@@ -10333,7 +11366,17 @@
                 </a:solidFill>
                 <a:latin typeface="맑은 고딕"/>
               </a:rPr>
-              <a:t>•  Standby 메시지 — **`Possible network disconnect`**</a:t>
+              <a:t>•  Standby 메시지 — </a:t>
+            </a:r>
+            <a:r>
+              <a:rPr sz="1700" b="1">
+                <a:solidFill>
+                  <a:srgbClr val="222222"/>
+                </a:solidFill>
+                <a:latin typeface="Consolas"/>
+                <a:cs typeface="Consolas"/>
+              </a:rPr>
+              <a:t>Possible network disconnect</a:t>
             </a:r>
           </a:p>
           <a:p>
@@ -10349,7 +11392,35 @@
                 </a:solidFill>
                 <a:latin typeface="맑은 고딕"/>
               </a:rPr>
-              <a:t>•  그 행의 **`ERROR_CODE` 는 0** (15장 필터로 걸러진다)</a:t>
+              <a:t>•  그 행의 </a:t>
+            </a:r>
+            <a:r>
+              <a:rPr sz="1700" b="1">
+                <a:solidFill>
+                  <a:srgbClr val="222222"/>
+                </a:solidFill>
+                <a:latin typeface="Consolas"/>
+                <a:cs typeface="Consolas"/>
+              </a:rPr>
+              <a:t>ERROR_CODE</a:t>
+            </a:r>
+            <a:r>
+              <a:rPr sz="1700" b="1">
+                <a:solidFill>
+                  <a:srgbClr val="222222"/>
+                </a:solidFill>
+                <a:latin typeface="맑은 고딕"/>
+              </a:rPr>
+              <a:t> 는 0</a:t>
+            </a:r>
+            <a:r>
+              <a:rPr sz="1700" b="0">
+                <a:solidFill>
+                  <a:srgbClr val="222222"/>
+                </a:solidFill>
+                <a:latin typeface="맑은 고딕"/>
+              </a:rPr>
+              <a:t> (15장 필터로 걸러진다)</a:t>
             </a:r>
           </a:p>
           <a:p>
@@ -10365,7 +11436,45 @@
                 </a:solidFill>
                 <a:latin typeface="맑은 고딕"/>
               </a:rPr>
-              <a:t>•  Broker — **`ORA-1034`** (SQL*Plus 는 `ORA-01034`)</a:t>
+              <a:t>•  Broker — </a:t>
+            </a:r>
+            <a:r>
+              <a:rPr sz="1700" b="1">
+                <a:solidFill>
+                  <a:srgbClr val="222222"/>
+                </a:solidFill>
+                <a:latin typeface="Consolas"/>
+                <a:cs typeface="Consolas"/>
+              </a:rPr>
+              <a:t>ORA-1034</a:t>
+            </a:r>
+            <a:r>
+              <a:rPr sz="1700" b="0">
+                <a:solidFill>
+                  <a:srgbClr val="222222"/>
+                </a:solidFill>
+                <a:latin typeface="맑은 고딕"/>
+              </a:rPr>
+              <a:t> (SQL*Plus 는 </a:t>
+            </a:r>
+            <a:r>
+              <a:rPr sz="1700" b="0">
+                <a:solidFill>
+                  <a:srgbClr val="222222"/>
+                </a:solidFill>
+                <a:latin typeface="Consolas"/>
+                <a:cs typeface="Consolas"/>
+              </a:rPr>
+              <a:t>ORA-01034</a:t>
+            </a:r>
+            <a:r>
+              <a:rPr sz="1700" b="0">
+                <a:solidFill>
+                  <a:srgbClr val="222222"/>
+                </a:solidFill>
+                <a:latin typeface="맑은 고딕"/>
+              </a:rPr>
+              <a:t>)</a:t>
             </a:r>
           </a:p>
         </p:txBody>
@@ -10544,7 +11653,35 @@
                 </a:solidFill>
                 <a:latin typeface="맑은 고딕"/>
               </a:rPr>
-              <a:t>•  `Ready for Switchover:` **No**</a:t>
+              <a:t>•  </a:t>
+            </a:r>
+            <a:r>
+              <a:rPr sz="1700" b="0">
+                <a:solidFill>
+                  <a:srgbClr val="222222"/>
+                </a:solidFill>
+                <a:latin typeface="Consolas"/>
+                <a:cs typeface="Consolas"/>
+              </a:rPr>
+              <a:t>Ready for Switchover:</a:t>
+            </a:r>
+            <a:r>
+              <a:rPr sz="1700" b="0">
+                <a:solidFill>
+                  <a:srgbClr val="222222"/>
+                </a:solidFill>
+                <a:latin typeface="맑은 고딕"/>
+              </a:rPr>
+              <a:t> </a:t>
+            </a:r>
+            <a:r>
+              <a:rPr sz="1700" b="1">
+                <a:solidFill>
+                  <a:srgbClr val="222222"/>
+                </a:solidFill>
+                <a:latin typeface="맑은 고딕"/>
+              </a:rPr>
+              <a:t>No</a:t>
             </a:r>
           </a:p>
           <a:p>
@@ -10560,7 +11697,35 @@
                 </a:solidFill>
                 <a:latin typeface="맑은 고딕"/>
               </a:rPr>
-              <a:t>•  `Ready for Failover:` **Yes (Primary Not Running)**</a:t>
+              <a:t>•  </a:t>
+            </a:r>
+            <a:r>
+              <a:rPr sz="1700" b="0">
+                <a:solidFill>
+                  <a:srgbClr val="222222"/>
+                </a:solidFill>
+                <a:latin typeface="Consolas"/>
+                <a:cs typeface="Consolas"/>
+              </a:rPr>
+              <a:t>Ready for Failover:</a:t>
+            </a:r>
+            <a:r>
+              <a:rPr sz="1700" b="0">
+                <a:solidFill>
+                  <a:srgbClr val="222222"/>
+                </a:solidFill>
+                <a:latin typeface="맑은 고딕"/>
+              </a:rPr>
+              <a:t> </a:t>
+            </a:r>
+            <a:r>
+              <a:rPr sz="1700" b="1">
+                <a:solidFill>
+                  <a:srgbClr val="222222"/>
+                </a:solidFill>
+                <a:latin typeface="맑은 고딕"/>
+              </a:rPr>
+              <a:t>Yes (Primary Not Running)</a:t>
             </a:r>
           </a:p>
           <a:p>
@@ -10576,7 +11741,17 @@
                 </a:solidFill>
                 <a:latin typeface="맑은 고딕"/>
               </a:rPr>
-              <a:t>•  chicago 관련 항목 전부 **`Unknown`**</a:t>
+              <a:t>•  chicago 관련 항목 전부 </a:t>
+            </a:r>
+            <a:r>
+              <a:rPr sz="1700" b="1">
+                <a:solidFill>
+                  <a:srgbClr val="222222"/>
+                </a:solidFill>
+                <a:latin typeface="Consolas"/>
+                <a:cs typeface="Consolas"/>
+              </a:rPr>
+              <a:t>Unknown</a:t>
             </a:r>
           </a:p>
           <a:p>
@@ -10592,7 +11767,36 @@
                 </a:solidFill>
                 <a:latin typeface="맑은 고딕"/>
               </a:rPr>
-              <a:t>•  `Transport On: No` / `Gap Status: Unknown`</a:t>
+              <a:t>•  </a:t>
+            </a:r>
+            <a:r>
+              <a:rPr sz="1700" b="0">
+                <a:solidFill>
+                  <a:srgbClr val="222222"/>
+                </a:solidFill>
+                <a:latin typeface="Consolas"/>
+                <a:cs typeface="Consolas"/>
+              </a:rPr>
+              <a:t>Transport On: No</a:t>
+            </a:r>
+            <a:r>
+              <a:rPr sz="1700" b="0">
+                <a:solidFill>
+                  <a:srgbClr val="222222"/>
+                </a:solidFill>
+                <a:latin typeface="맑은 고딕"/>
+              </a:rPr>
+              <a:t> / </a:t>
+            </a:r>
+            <a:r>
+              <a:rPr sz="1700" b="0">
+                <a:solidFill>
+                  <a:srgbClr val="222222"/>
+                </a:solidFill>
+                <a:latin typeface="Consolas"/>
+                <a:cs typeface="Consolas"/>
+              </a:rPr>
+              <a:t>Gap Status: Unknown</a:t>
             </a:r>
           </a:p>
         </p:txBody>
@@ -10771,7 +11975,17 @@
                 </a:solidFill>
                 <a:latin typeface="맑은 고딕"/>
               </a:rPr>
-              <a:t>•  `Performing failover NOW, please wait...`</a:t>
+              <a:t>•  </a:t>
+            </a:r>
+            <a:r>
+              <a:rPr sz="1700" b="0">
+                <a:solidFill>
+                  <a:srgbClr val="222222"/>
+                </a:solidFill>
+                <a:latin typeface="Consolas"/>
+                <a:cs typeface="Consolas"/>
+              </a:rPr>
+              <a:t>Performing failover NOW, please wait...</a:t>
             </a:r>
           </a:p>
           <a:p>
@@ -10787,7 +12001,17 @@
                 </a:solidFill>
                 <a:latin typeface="맑은 고딕"/>
               </a:rPr>
-              <a:t>•  `Failover succeeded, new primary is "boston"`</a:t>
+              <a:t>•  </a:t>
+            </a:r>
+            <a:r>
+              <a:rPr sz="1700" b="0">
+                <a:solidFill>
+                  <a:srgbClr val="222222"/>
+                </a:solidFill>
+                <a:latin typeface="Consolas"/>
+                <a:cs typeface="Consolas"/>
+              </a:rPr>
+              <a:t>Failover succeeded, new primary is "boston"</a:t>
             </a:r>
           </a:p>
           <a:p>
@@ -10803,7 +12027,44 @@
                 </a:solidFill>
                 <a:latin typeface="맑은 고딕"/>
               </a:rPr>
-              <a:t>•  **손실 없음** — 강제 종료 직전 커밋한 `id=97` 생존</a:t>
+              <a:t>•  </a:t>
+            </a:r>
+            <a:r>
+              <a:rPr sz="1700" b="1">
+                <a:solidFill>
+                  <a:srgbClr val="222222"/>
+                </a:solidFill>
+                <a:latin typeface="맑은 고딕"/>
+              </a:rPr>
+              <a:t>손실 없음</a:t>
+            </a:r>
+            <a:r>
+              <a:rPr sz="1700" b="0">
+                <a:solidFill>
+                  <a:srgbClr val="222222"/>
+                </a:solidFill>
+                <a:latin typeface="맑은 고딕"/>
+              </a:rPr>
+              <a:t> — 강제 종료 직전 커밋한 </a:t>
+            </a:r>
+            <a:r>
+              <a:rPr sz="1700" b="0">
+                <a:solidFill>
+                  <a:srgbClr val="222222"/>
+                </a:solidFill>
+                <a:latin typeface="Consolas"/>
+                <a:cs typeface="Consolas"/>
+              </a:rPr>
+              <a:t>id=97</a:t>
+            </a:r>
+            <a:r>
+              <a:rPr sz="1700" b="0">
+                <a:solidFill>
+                  <a:srgbClr val="222222"/>
+                </a:solidFill>
+                <a:latin typeface="맑은 고딕"/>
+              </a:rPr>
+              <a:t> 생존</a:t>
             </a:r>
           </a:p>
           <a:p>
@@ -10819,7 +12080,35 @@
                 </a:solidFill>
                 <a:latin typeface="맑은 고딕"/>
               </a:rPr>
-              <a:t>•  `RESETLOGS_CHANGE# 2692902` — **OPEN RESETLOGS**</a:t>
+              <a:t>•  </a:t>
+            </a:r>
+            <a:r>
+              <a:rPr sz="1700" b="0">
+                <a:solidFill>
+                  <a:srgbClr val="222222"/>
+                </a:solidFill>
+                <a:latin typeface="Consolas"/>
+                <a:cs typeface="Consolas"/>
+              </a:rPr>
+              <a:t>RESETLOGS_CHANGE# 2692902</a:t>
+            </a:r>
+            <a:r>
+              <a:rPr sz="1700" b="0">
+                <a:solidFill>
+                  <a:srgbClr val="222222"/>
+                </a:solidFill>
+                <a:latin typeface="맑은 고딕"/>
+              </a:rPr>
+              <a:t> — </a:t>
+            </a:r>
+            <a:r>
+              <a:rPr sz="1700" b="1">
+                <a:solidFill>
+                  <a:srgbClr val="222222"/>
+                </a:solidFill>
+                <a:latin typeface="맑은 고딕"/>
+              </a:rPr>
+              <a:t>OPEN RESETLOGS</a:t>
             </a:r>
           </a:p>
         </p:txBody>
@@ -11234,7 +12523,36 @@
                 </a:solidFill>
                 <a:latin typeface="맑은 고딕"/>
               </a:rPr>
-              <a:t>•  `chicago - Physical standby database` **`(disabled)`**</a:t>
+              <a:t>•  </a:t>
+            </a:r>
+            <a:r>
+              <a:rPr sz="1700" b="0">
+                <a:solidFill>
+                  <a:srgbClr val="222222"/>
+                </a:solidFill>
+                <a:latin typeface="Consolas"/>
+                <a:cs typeface="Consolas"/>
+              </a:rPr>
+              <a:t>chicago - Physical standby database</a:t>
+            </a:r>
+            <a:r>
+              <a:rPr sz="1700" b="0">
+                <a:solidFill>
+                  <a:srgbClr val="222222"/>
+                </a:solidFill>
+                <a:latin typeface="맑은 고딕"/>
+              </a:rPr>
+              <a:t> </a:t>
+            </a:r>
+            <a:r>
+              <a:rPr sz="1700" b="1">
+                <a:solidFill>
+                  <a:srgbClr val="222222"/>
+                </a:solidFill>
+                <a:latin typeface="Consolas"/>
+                <a:cs typeface="Consolas"/>
+              </a:rPr>
+              <a:t>(disabled)</a:t>
             </a:r>
           </a:p>
           <a:p>
@@ -11250,7 +12568,17 @@
                 </a:solidFill>
                 <a:latin typeface="맑은 고딕"/>
               </a:rPr>
-              <a:t>•  `ORA-16661: the standby database needs to be reinstated`</a:t>
+              <a:t>•  </a:t>
+            </a:r>
+            <a:r>
+              <a:rPr sz="1700" b="0">
+                <a:solidFill>
+                  <a:srgbClr val="222222"/>
+                </a:solidFill>
+                <a:latin typeface="Consolas"/>
+                <a:cs typeface="Consolas"/>
+              </a:rPr>
+              <a:t>ORA-16661: the standby database needs to be reinstated</a:t>
             </a:r>
           </a:p>
           <a:p>
@@ -11266,7 +12594,36 @@
                 </a:solidFill>
                 <a:latin typeface="맑은 고딕"/>
               </a:rPr>
-              <a:t>•  그런데 `Configuration Status:` **`SUCCESS`**</a:t>
+              <a:t>•  그런데 </a:t>
+            </a:r>
+            <a:r>
+              <a:rPr sz="1700" b="0">
+                <a:solidFill>
+                  <a:srgbClr val="222222"/>
+                </a:solidFill>
+                <a:latin typeface="Consolas"/>
+                <a:cs typeface="Consolas"/>
+              </a:rPr>
+              <a:t>Configuration Status:</a:t>
+            </a:r>
+            <a:r>
+              <a:rPr sz="1700" b="0">
+                <a:solidFill>
+                  <a:srgbClr val="222222"/>
+                </a:solidFill>
+                <a:latin typeface="맑은 고딕"/>
+              </a:rPr>
+              <a:t> </a:t>
+            </a:r>
+            <a:r>
+              <a:rPr sz="1700" b="1">
+                <a:solidFill>
+                  <a:srgbClr val="222222"/>
+                </a:solidFill>
+                <a:latin typeface="Consolas"/>
+                <a:cs typeface="Consolas"/>
+              </a:rPr>
+              <a:t>SUCCESS</a:t>
             </a:r>
           </a:p>
           <a:p>
@@ -11282,7 +12639,16 @@
                 </a:solidFill>
                 <a:latin typeface="맑은 고딕"/>
               </a:rPr>
-              <a:t>•  **비활성 멤버는 판정에서 제외된다**</a:t>
+              <a:t>•  </a:t>
+            </a:r>
+            <a:r>
+              <a:rPr sz="1700" b="1">
+                <a:solidFill>
+                  <a:srgbClr val="222222"/>
+                </a:solidFill>
+                <a:latin typeface="맑은 고딕"/>
+              </a:rPr>
+              <a:t>비활성 멤버는 판정에서 제외된다</a:t>
             </a:r>
           </a:p>
         </p:txBody>
@@ -11461,7 +12827,17 @@
                 </a:solidFill>
                 <a:latin typeface="맑은 고딕"/>
               </a:rPr>
-              <a:t>•  내려간 채로 시도 → **`ORA-16653`**</a:t>
+              <a:t>•  내려간 채로 시도 → </a:t>
+            </a:r>
+            <a:r>
+              <a:rPr sz="1700" b="1">
+                <a:solidFill>
+                  <a:srgbClr val="222222"/>
+                </a:solidFill>
+                <a:latin typeface="Consolas"/>
+                <a:cs typeface="Consolas"/>
+              </a:rPr>
+              <a:t>ORA-16653</a:t>
             </a:r>
           </a:p>
           <a:p>
@@ -11477,7 +12853,35 @@
                 </a:solidFill>
                 <a:latin typeface="맑은 고딕"/>
               </a:rPr>
-              <a:t>•  `STARTUP MOUNT` — **열면 안 된다**</a:t>
+              <a:t>•  </a:t>
+            </a:r>
+            <a:r>
+              <a:rPr sz="1700" b="0">
+                <a:solidFill>
+                  <a:srgbClr val="222222"/>
+                </a:solidFill>
+                <a:latin typeface="Consolas"/>
+                <a:cs typeface="Consolas"/>
+              </a:rPr>
+              <a:t>STARTUP MOUNT</a:t>
+            </a:r>
+            <a:r>
+              <a:rPr sz="1700" b="0">
+                <a:solidFill>
+                  <a:srgbClr val="222222"/>
+                </a:solidFill>
+                <a:latin typeface="맑은 고딕"/>
+              </a:rPr>
+              <a:t> — </a:t>
+            </a:r>
+            <a:r>
+              <a:rPr sz="1700" b="1">
+                <a:solidFill>
+                  <a:srgbClr val="222222"/>
+                </a:solidFill>
+                <a:latin typeface="맑은 고딕"/>
+              </a:rPr>
+              <a:t>열면 안 된다</a:t>
             </a:r>
           </a:p>
           <a:p>
@@ -11493,7 +12897,26 @@
                 </a:solidFill>
                 <a:latin typeface="맑은 고딕"/>
               </a:rPr>
-              <a:t>•  마운트한 옛 Primary 는 자기를 **`PRIMARY`** 라고 말한다</a:t>
+              <a:t>•  마운트한 옛 Primary 는 자기를 </a:t>
+            </a:r>
+            <a:r>
+              <a:rPr sz="1700" b="1">
+                <a:solidFill>
+                  <a:srgbClr val="222222"/>
+                </a:solidFill>
+                <a:latin typeface="Consolas"/>
+                <a:cs typeface="Consolas"/>
+              </a:rPr>
+              <a:t>PRIMARY</a:t>
+            </a:r>
+            <a:r>
+              <a:rPr sz="1700" b="0">
+                <a:solidFill>
+                  <a:srgbClr val="222222"/>
+                </a:solidFill>
+                <a:latin typeface="맑은 고딕"/>
+              </a:rPr>
+              <a:t> 라고 말한다</a:t>
             </a:r>
           </a:p>
           <a:p>
@@ -11509,7 +12932,35 @@
                 </a:solidFill>
                 <a:latin typeface="맑은 고딕"/>
               </a:rPr>
-              <a:t>•  `reinstate database 'chicago'` → **51초**</a:t>
+              <a:t>•  </a:t>
+            </a:r>
+            <a:r>
+              <a:rPr sz="1700" b="0">
+                <a:solidFill>
+                  <a:srgbClr val="222222"/>
+                </a:solidFill>
+                <a:latin typeface="Consolas"/>
+                <a:cs typeface="Consolas"/>
+              </a:rPr>
+              <a:t>reinstate database 'chicago'</a:t>
+            </a:r>
+            <a:r>
+              <a:rPr sz="1700" b="0">
+                <a:solidFill>
+                  <a:srgbClr val="222222"/>
+                </a:solidFill>
+                <a:latin typeface="맑은 고딕"/>
+              </a:rPr>
+              <a:t> → </a:t>
+            </a:r>
+            <a:r>
+              <a:rPr sz="1700" b="1">
+                <a:solidFill>
+                  <a:srgbClr val="222222"/>
+                </a:solidFill>
+                <a:latin typeface="맑은 고딕"/>
+              </a:rPr>
+              <a:t>51초</a:t>
             </a:r>
           </a:p>
         </p:txBody>
@@ -11688,7 +13139,17 @@
                 </a:solidFill>
                 <a:latin typeface="맑은 고딕"/>
               </a:rPr>
-              <a:t>•  `PHYSICAL STANDBY / READ ONLY WITH APPLY`</a:t>
+              <a:t>•  </a:t>
+            </a:r>
+            <a:r>
+              <a:rPr sz="1700" b="0">
+                <a:solidFill>
+                  <a:srgbClr val="222222"/>
+                </a:solidFill>
+                <a:latin typeface="Consolas"/>
+                <a:cs typeface="Consolas"/>
+              </a:rPr>
+              <a:t>PHYSICAL STANDBY / READ ONLY WITH APPLY</a:t>
             </a:r>
           </a:p>
           <a:p>
@@ -11704,7 +13165,44 @@
                 </a:solidFill>
                 <a:latin typeface="맑은 고딕"/>
               </a:rPr>
-              <a:t>•  `MRP0 APPLYING_LOG` **시퀀스 4** (전환 전에는 95)</a:t>
+              <a:t>•  </a:t>
+            </a:r>
+            <a:r>
+              <a:rPr sz="1700" b="0">
+                <a:solidFill>
+                  <a:srgbClr val="222222"/>
+                </a:solidFill>
+                <a:latin typeface="Consolas"/>
+                <a:cs typeface="Consolas"/>
+              </a:rPr>
+              <a:t>MRP0 APPLYING_LOG</a:t>
+            </a:r>
+            <a:r>
+              <a:rPr sz="1700" b="0">
+                <a:solidFill>
+                  <a:srgbClr val="222222"/>
+                </a:solidFill>
+                <a:latin typeface="맑은 고딕"/>
+              </a:rPr>
+              <a:t> </a:t>
+            </a:r>
+            <a:r>
+              <a:rPr sz="1700" b="1">
+                <a:solidFill>
+                  <a:srgbClr val="222222"/>
+                </a:solidFill>
+                <a:latin typeface="맑은 고딕"/>
+              </a:rPr>
+              <a:t>시퀀스 4</a:t>
+            </a:r>
+            <a:r>
+              <a:rPr sz="1700" b="0">
+                <a:solidFill>
+                  <a:srgbClr val="222222"/>
+                </a:solidFill>
+                <a:latin typeface="맑은 고딕"/>
+              </a:rPr>
+              <a:t> (전환 전에는 95)</a:t>
             </a:r>
           </a:p>
           <a:p>
@@ -11720,7 +13218,35 @@
                 </a:solidFill>
                 <a:latin typeface="맑은 고딕"/>
               </a:rPr>
-              <a:t>•  Failover 후 넣은 `id=98` 까지 **따라잡았다**</a:t>
+              <a:t>•  Failover 후 넣은 </a:t>
+            </a:r>
+            <a:r>
+              <a:rPr sz="1700" b="0">
+                <a:solidFill>
+                  <a:srgbClr val="222222"/>
+                </a:solidFill>
+                <a:latin typeface="Consolas"/>
+                <a:cs typeface="Consolas"/>
+              </a:rPr>
+              <a:t>id=98</a:t>
+            </a:r>
+            <a:r>
+              <a:rPr sz="1700" b="0">
+                <a:solidFill>
+                  <a:srgbClr val="222222"/>
+                </a:solidFill>
+                <a:latin typeface="맑은 고딕"/>
+              </a:rPr>
+              <a:t> 까지 </a:t>
+            </a:r>
+            <a:r>
+              <a:rPr sz="1700" b="1">
+                <a:solidFill>
+                  <a:srgbClr val="222222"/>
+                </a:solidFill>
+                <a:latin typeface="맑은 고딕"/>
+              </a:rPr>
+              <a:t>따라잡았다</a:t>
             </a:r>
           </a:p>
           <a:p>
@@ -11736,7 +13262,16 @@
                 </a:solidFill>
                 <a:latin typeface="맑은 고딕"/>
               </a:rPr>
-              <a:t>•  15장의 시퀀스 비교는 **기준선을 새로 잡아야 한다**</a:t>
+              <a:t>•  15장의 시퀀스 비교는 </a:t>
+            </a:r>
+            <a:r>
+              <a:rPr sz="1700" b="1">
+                <a:solidFill>
+                  <a:srgbClr val="222222"/>
+                </a:solidFill>
+                <a:latin typeface="맑은 고딕"/>
+              </a:rPr>
+              <a:t>기준선을 새로 잡아야 한다</a:t>
             </a:r>
           </a:p>
         </p:txBody>
@@ -11915,7 +13450,16 @@
                 </a:solidFill>
                 <a:latin typeface="맑은 고딕"/>
               </a:rPr>
-              <a:t>•  Switchover — **64초 / 69초 / 55초**</a:t>
+              <a:t>•  Switchover — </a:t>
+            </a:r>
+            <a:r>
+              <a:rPr sz="1700" b="1">
+                <a:solidFill>
+                  <a:srgbClr val="222222"/>
+                </a:solidFill>
+                <a:latin typeface="맑은 고딕"/>
+              </a:rPr>
+              <a:t>64초 / 69초 / 55초</a:t>
             </a:r>
           </a:p>
           <a:p>
@@ -11931,7 +13475,16 @@
                 </a:solidFill>
                 <a:latin typeface="맑은 고딕"/>
               </a:rPr>
-              <a:t>•  Failover — **24초**</a:t>
+              <a:t>•  Failover — </a:t>
+            </a:r>
+            <a:r>
+              <a:rPr sz="1700" b="1">
+                <a:solidFill>
+                  <a:srgbClr val="222222"/>
+                </a:solidFill>
+                <a:latin typeface="맑은 고딕"/>
+              </a:rPr>
+              <a:t>24초</a:t>
             </a:r>
           </a:p>
           <a:p>
@@ -11947,7 +13500,16 @@
                 </a:solidFill>
                 <a:latin typeface="맑은 고딕"/>
               </a:rPr>
-              <a:t>•  Reinstate — **51초**</a:t>
+              <a:t>•  Reinstate — </a:t>
+            </a:r>
+            <a:r>
+              <a:rPr sz="1700" b="1">
+                <a:solidFill>
+                  <a:srgbClr val="222222"/>
+                </a:solidFill>
+                <a:latin typeface="맑은 고딕"/>
+              </a:rPr>
+              <a:t>51초</a:t>
             </a:r>
           </a:p>
           <a:p>
@@ -11963,7 +13525,35 @@
                 </a:solidFill>
                 <a:latin typeface="맑은 고딕"/>
               </a:rPr>
-              <a:t>•  14장 `estimated startup time` — **11초**</a:t>
+              <a:t>•  14장 </a:t>
+            </a:r>
+            <a:r>
+              <a:rPr sz="1700" b="0">
+                <a:solidFill>
+                  <a:srgbClr val="222222"/>
+                </a:solidFill>
+                <a:latin typeface="Consolas"/>
+                <a:cs typeface="Consolas"/>
+              </a:rPr>
+              <a:t>estimated startup time</a:t>
+            </a:r>
+            <a:r>
+              <a:rPr sz="1700" b="0">
+                <a:solidFill>
+                  <a:srgbClr val="222222"/>
+                </a:solidFill>
+                <a:latin typeface="맑은 고딕"/>
+              </a:rPr>
+              <a:t> — </a:t>
+            </a:r>
+            <a:r>
+              <a:rPr sz="1700" b="1">
+                <a:solidFill>
+                  <a:srgbClr val="222222"/>
+                </a:solidFill>
+                <a:latin typeface="맑은 고딕"/>
+              </a:rPr>
+              <a:t>11초</a:t>
             </a:r>
           </a:p>
         </p:txBody>
@@ -12381,7 +13971,25 @@
                 </a:solidFill>
                 <a:latin typeface="맑은 고딕"/>
               </a:rPr>
-              <a:t>•  호스트 **farsync-srv** — 인스턴스 없이 소프트웨어만</a:t>
+              <a:t>•  호스트 </a:t>
+            </a:r>
+            <a:r>
+              <a:rPr sz="1700" b="1">
+                <a:solidFill>
+                  <a:srgbClr val="222222"/>
+                </a:solidFill>
+                <a:latin typeface="맑은 고딕"/>
+              </a:rPr>
+              <a:t>farsync-srv</a:t>
+            </a:r>
+            <a:r>
+              <a:rPr sz="1700" b="0">
+                <a:solidFill>
+                  <a:srgbClr val="222222"/>
+                </a:solidFill>
+                <a:latin typeface="맑은 고딕"/>
+              </a:rPr>
+              <a:t> — 인스턴스 없이 소프트웨어만</a:t>
             </a:r>
           </a:p>
           <a:p>
@@ -12397,7 +14005,36 @@
                 </a:solidFill>
                 <a:latin typeface="맑은 고딕"/>
               </a:rPr>
-              <a:t>•  `CONNECT IDENTIFIER IS` 형식 → **`ORA-01017`**</a:t>
+              <a:t>•  </a:t>
+            </a:r>
+            <a:r>
+              <a:rPr sz="1700" b="0">
+                <a:solidFill>
+                  <a:srgbClr val="222222"/>
+                </a:solidFill>
+                <a:latin typeface="Consolas"/>
+                <a:cs typeface="Consolas"/>
+              </a:rPr>
+              <a:t>CONNECT IDENTIFIER IS</a:t>
+            </a:r>
+            <a:r>
+              <a:rPr sz="1700" b="0">
+                <a:solidFill>
+                  <a:srgbClr val="222222"/>
+                </a:solidFill>
+                <a:latin typeface="맑은 고딕"/>
+              </a:rPr>
+              <a:t> 형식 → </a:t>
+            </a:r>
+            <a:r>
+              <a:rPr sz="1700" b="1">
+                <a:solidFill>
+                  <a:srgbClr val="222222"/>
+                </a:solidFill>
+                <a:latin typeface="Consolas"/>
+                <a:cs typeface="Consolas"/>
+              </a:rPr>
+              <a:t>ORA-01017</a:t>
             </a:r>
           </a:p>
           <a:p>
@@ -12413,7 +14050,26 @@
                 </a:solidFill>
                 <a:latin typeface="맑은 고딕"/>
               </a:rPr>
-              <a:t>•  `nohup dgmgrl ... "start observer file='...'" &amp;` 로 띄운다</a:t>
+              <a:t>•  </a:t>
+            </a:r>
+            <a:r>
+              <a:rPr sz="1700" b="0">
+                <a:solidFill>
+                  <a:srgbClr val="222222"/>
+                </a:solidFill>
+                <a:latin typeface="Consolas"/>
+                <a:cs typeface="Consolas"/>
+              </a:rPr>
+              <a:t>nohup dgmgrl ... "start observer file='...'" &amp;</a:t>
+            </a:r>
+            <a:r>
+              <a:rPr sz="1700" b="0">
+                <a:solidFill>
+                  <a:srgbClr val="222222"/>
+                </a:solidFill>
+                <a:latin typeface="맑은 고딕"/>
+              </a:rPr>
+              <a:t> 로 띄운다</a:t>
             </a:r>
           </a:p>
           <a:p>
@@ -12429,7 +14085,45 @@
                 </a:solidFill>
                 <a:latin typeface="맑은 고딕"/>
               </a:rPr>
-              <a:t>•  `Observer 'farsync-srv' started` / `.dat` 116바이트</a:t>
+              <a:t>•  </a:t>
+            </a:r>
+            <a:r>
+              <a:rPr sz="1700" b="0">
+                <a:solidFill>
+                  <a:srgbClr val="222222"/>
+                </a:solidFill>
+                <a:latin typeface="Consolas"/>
+                <a:cs typeface="Consolas"/>
+              </a:rPr>
+              <a:t>Observer 'farsync-srv' started</a:t>
+            </a:r>
+            <a:r>
+              <a:rPr sz="1700" b="0">
+                <a:solidFill>
+                  <a:srgbClr val="222222"/>
+                </a:solidFill>
+                <a:latin typeface="맑은 고딕"/>
+              </a:rPr>
+              <a:t> / </a:t>
+            </a:r>
+            <a:r>
+              <a:rPr sz="1700" b="0">
+                <a:solidFill>
+                  <a:srgbClr val="222222"/>
+                </a:solidFill>
+                <a:latin typeface="Consolas"/>
+                <a:cs typeface="Consolas"/>
+              </a:rPr>
+              <a:t>.dat</a:t>
+            </a:r>
+            <a:r>
+              <a:rPr sz="1700" b="0">
+                <a:solidFill>
+                  <a:srgbClr val="222222"/>
+                </a:solidFill>
+                <a:latin typeface="맑은 고딕"/>
+              </a:rPr>
+              <a:t> 116바이트</a:t>
             </a:r>
           </a:p>
         </p:txBody>
@@ -12608,7 +14302,45 @@
                 </a:solidFill>
                 <a:latin typeface="맑은 고딕"/>
               </a:rPr>
-              <a:t>•  `Observer: farsync-srv` — **`ORA-16819` 사라짐**</a:t>
+              <a:t>•  </a:t>
+            </a:r>
+            <a:r>
+              <a:rPr sz="1700" b="0">
+                <a:solidFill>
+                  <a:srgbClr val="222222"/>
+                </a:solidFill>
+                <a:latin typeface="Consolas"/>
+                <a:cs typeface="Consolas"/>
+              </a:rPr>
+              <a:t>Observer: farsync-srv</a:t>
+            </a:r>
+            <a:r>
+              <a:rPr sz="1700" b="0">
+                <a:solidFill>
+                  <a:srgbClr val="222222"/>
+                </a:solidFill>
+                <a:latin typeface="맑은 고딕"/>
+              </a:rPr>
+              <a:t> — </a:t>
+            </a:r>
+            <a:r>
+              <a:rPr sz="1700" b="1">
+                <a:solidFill>
+                  <a:srgbClr val="222222"/>
+                </a:solidFill>
+                <a:latin typeface="Consolas"/>
+                <a:cs typeface="Consolas"/>
+              </a:rPr>
+              <a:t>ORA-16819</a:t>
+            </a:r>
+            <a:r>
+              <a:rPr sz="1700" b="1">
+                <a:solidFill>
+                  <a:srgbClr val="222222"/>
+                </a:solidFill>
+                <a:latin typeface="맑은 고딕"/>
+              </a:rPr>
+              <a:t> 사라짐</a:t>
             </a:r>
           </a:p>
           <a:p>
@@ -12624,7 +14356,17 @@
                 </a:solidFill>
                 <a:latin typeface="맑은 고딕"/>
               </a:rPr>
-              <a:t>•  `Observer "farsync-srv" - Master`</a:t>
+              <a:t>•  </a:t>
+            </a:r>
+            <a:r>
+              <a:rPr sz="1700" b="0">
+                <a:solidFill>
+                  <a:srgbClr val="222222"/>
+                </a:solidFill>
+                <a:latin typeface="Consolas"/>
+                <a:cs typeface="Consolas"/>
+              </a:rPr>
+              <a:t>Observer "farsync-srv" - Master</a:t>
             </a:r>
           </a:p>
           <a:p>
@@ -12640,7 +14382,17 @@
                 </a:solidFill>
                 <a:latin typeface="맑은 고딕"/>
               </a:rPr>
-              <a:t>•  `Last Ping to Primary: 2 seconds ago`</a:t>
+              <a:t>•  </a:t>
+            </a:r>
+            <a:r>
+              <a:rPr sz="1700" b="0">
+                <a:solidFill>
+                  <a:srgbClr val="222222"/>
+                </a:solidFill>
+                <a:latin typeface="Consolas"/>
+                <a:cs typeface="Consolas"/>
+              </a:rPr>
+              <a:t>Last Ping to Primary: 2 seconds ago</a:t>
             </a:r>
           </a:p>
           <a:p>
@@ -12656,7 +14408,17 @@
                 </a:solidFill>
                 <a:latin typeface="맑은 고딕"/>
               </a:rPr>
-              <a:t>•  `Last Ping to Target: 2 seconds ago`</a:t>
+              <a:t>•  </a:t>
+            </a:r>
+            <a:r>
+              <a:rPr sz="1700" b="0">
+                <a:solidFill>
+                  <a:srgbClr val="222222"/>
+                </a:solidFill>
+                <a:latin typeface="Consolas"/>
+                <a:cs typeface="Consolas"/>
+              </a:rPr>
+              <a:t>Last Ping to Target: 2 seconds ago</a:t>
             </a:r>
           </a:p>
         </p:txBody>
@@ -12835,7 +14597,35 @@
                 </a:solidFill>
                 <a:latin typeface="맑은 고딕"/>
               </a:rPr>
-              <a:t>•  `shutdown abort` 후 **아무 명령도 내리지 않는다**</a:t>
+              <a:t>•  </a:t>
+            </a:r>
+            <a:r>
+              <a:rPr sz="1700" b="0">
+                <a:solidFill>
+                  <a:srgbClr val="222222"/>
+                </a:solidFill>
+                <a:latin typeface="Consolas"/>
+                <a:cs typeface="Consolas"/>
+              </a:rPr>
+              <a:t>shutdown abort</a:t>
+            </a:r>
+            <a:r>
+              <a:rPr sz="1700" b="0">
+                <a:solidFill>
+                  <a:srgbClr val="222222"/>
+                </a:solidFill>
+                <a:latin typeface="맑은 고딕"/>
+              </a:rPr>
+              <a:t> 후 </a:t>
+            </a:r>
+            <a:r>
+              <a:rPr sz="1700" b="1">
+                <a:solidFill>
+                  <a:srgbClr val="222222"/>
+                </a:solidFill>
+                <a:latin typeface="맑은 고딕"/>
+              </a:rPr>
+              <a:t>아무 명령도 내리지 않는다</a:t>
             </a:r>
           </a:p>
           <a:p>
@@ -12867,7 +14657,26 @@
                 </a:solidFill>
                 <a:latin typeface="맑은 고딕"/>
               </a:rPr>
-              <a:t>•  53초 — **`MOUNTED`** (전환 중)</a:t>
+              <a:t>•  53초 — </a:t>
+            </a:r>
+            <a:r>
+              <a:rPr sz="1700" b="1">
+                <a:solidFill>
+                  <a:srgbClr val="222222"/>
+                </a:solidFill>
+                <a:latin typeface="Consolas"/>
+                <a:cs typeface="Consolas"/>
+              </a:rPr>
+              <a:t>MOUNTED</a:t>
+            </a:r>
+            <a:r>
+              <a:rPr sz="1700" b="0">
+                <a:solidFill>
+                  <a:srgbClr val="222222"/>
+                </a:solidFill>
+                <a:latin typeface="맑은 고딕"/>
+              </a:rPr>
+              <a:t> (전환 중)</a:t>
             </a:r>
           </a:p>
           <a:p>
@@ -12883,7 +14692,17 @@
                 </a:solidFill>
                 <a:latin typeface="맑은 고딕"/>
               </a:rPr>
-              <a:t>•  69초 — **`PRIMARY / READ WRITE`**</a:t>
+              <a:t>•  69초 — </a:t>
+            </a:r>
+            <a:r>
+              <a:rPr sz="1700" b="1">
+                <a:solidFill>
+                  <a:srgbClr val="222222"/>
+                </a:solidFill>
+                <a:latin typeface="Consolas"/>
+                <a:cs typeface="Consolas"/>
+              </a:rPr>
+              <a:t>PRIMARY / READ WRITE</a:t>
             </a:r>
           </a:p>
         </p:txBody>
@@ -13062,7 +14881,17 @@
                 </a:solidFill>
                 <a:latin typeface="맑은 고딕"/>
               </a:rPr>
-              <a:t>•  `threshold has not exceeded. Retry for the next 3 seconds`</a:t>
+              <a:t>•  </a:t>
+            </a:r>
+            <a:r>
+              <a:rPr sz="1700" b="0">
+                <a:solidFill>
+                  <a:srgbClr val="222222"/>
+                </a:solidFill>
+                <a:latin typeface="Consolas"/>
+                <a:cs typeface="Consolas"/>
+              </a:rPr>
+              <a:t>threshold has not exceeded. Retry for the next 3 seconds</a:t>
             </a:r>
           </a:p>
           <a:p>
@@ -13078,7 +14907,36 @@
                 </a:solidFill>
                 <a:latin typeface="맑은 고딕"/>
               </a:rPr>
-              <a:t>•  `threshold has expired.` → `Making a last connection attempt`</a:t>
+              <a:t>•  </a:t>
+            </a:r>
+            <a:r>
+              <a:rPr sz="1700" b="0">
+                <a:solidFill>
+                  <a:srgbClr val="222222"/>
+                </a:solidFill>
+                <a:latin typeface="Consolas"/>
+                <a:cs typeface="Consolas"/>
+              </a:rPr>
+              <a:t>threshold has expired.</a:t>
+            </a:r>
+            <a:r>
+              <a:rPr sz="1700" b="0">
+                <a:solidFill>
+                  <a:srgbClr val="222222"/>
+                </a:solidFill>
+                <a:latin typeface="맑은 고딕"/>
+              </a:rPr>
+              <a:t> → </a:t>
+            </a:r>
+            <a:r>
+              <a:rPr sz="1700" b="0">
+                <a:solidFill>
+                  <a:srgbClr val="222222"/>
+                </a:solidFill>
+                <a:latin typeface="Consolas"/>
+                <a:cs typeface="Consolas"/>
+              </a:rPr>
+              <a:t>Making a last connection attempt</a:t>
             </a:r>
           </a:p>
           <a:p>
@@ -13094,7 +14952,17 @@
                 </a:solidFill>
                 <a:latin typeface="맑은 고딕"/>
               </a:rPr>
-              <a:t>•  **`not possible because primary last contacted the standby`**</a:t>
+              <a:t>•  </a:t>
+            </a:r>
+            <a:r>
+              <a:rPr sz="1700" b="1">
+                <a:solidFill>
+                  <a:srgbClr val="222222"/>
+                </a:solidFill>
+                <a:latin typeface="Consolas"/>
+                <a:cs typeface="Consolas"/>
+              </a:rPr>
+              <a:t>not possible because primary last contacted the standby</a:t>
             </a:r>
           </a:p>
           <a:p>
@@ -13110,7 +14978,36 @@
                 </a:solidFill>
                 <a:latin typeface="맑은 고딕"/>
               </a:rPr>
-              <a:t>•  `Failed to ping the primary.` → `Fast-Start Failover started...`</a:t>
+              <a:t>•  </a:t>
+            </a:r>
+            <a:r>
+              <a:rPr sz="1700" b="0">
+                <a:solidFill>
+                  <a:srgbClr val="222222"/>
+                </a:solidFill>
+                <a:latin typeface="Consolas"/>
+                <a:cs typeface="Consolas"/>
+              </a:rPr>
+              <a:t>Failed to ping the primary.</a:t>
+            </a:r>
+            <a:r>
+              <a:rPr sz="1700" b="0">
+                <a:solidFill>
+                  <a:srgbClr val="222222"/>
+                </a:solidFill>
+                <a:latin typeface="맑은 고딕"/>
+              </a:rPr>
+              <a:t> → </a:t>
+            </a:r>
+            <a:r>
+              <a:rPr sz="1700" b="0">
+                <a:solidFill>
+                  <a:srgbClr val="222222"/>
+                </a:solidFill>
+                <a:latin typeface="Consolas"/>
+                <a:cs typeface="Consolas"/>
+              </a:rPr>
+              <a:t>Fast-Start Failover started...</a:t>
             </a:r>
           </a:p>
         </p:txBody>
@@ -13289,7 +15186,35 @@
                 </a:solidFill>
                 <a:latin typeface="맑은 고딕"/>
               </a:rPr>
-              <a:t>•  옛 Primary 를 **`MOUNT` 까지만** 올린다</a:t>
+              <a:t>•  옛 Primary 를 </a:t>
+            </a:r>
+            <a:r>
+              <a:rPr sz="1700" b="1">
+                <a:solidFill>
+                  <a:srgbClr val="222222"/>
+                </a:solidFill>
+                <a:latin typeface="Consolas"/>
+                <a:cs typeface="Consolas"/>
+              </a:rPr>
+              <a:t>MOUNT</a:t>
+            </a:r>
+            <a:r>
+              <a:rPr sz="1700" b="1">
+                <a:solidFill>
+                  <a:srgbClr val="222222"/>
+                </a:solidFill>
+                <a:latin typeface="맑은 고딕"/>
+              </a:rPr>
+              <a:t> 까지만</a:t>
+            </a:r>
+            <a:r>
+              <a:rPr sz="1700" b="0">
+                <a:solidFill>
+                  <a:srgbClr val="222222"/>
+                </a:solidFill>
+                <a:latin typeface="맑은 고딕"/>
+              </a:rPr>
+              <a:t> 올린다</a:t>
             </a:r>
           </a:p>
           <a:p>
@@ -13305,7 +15230,17 @@
                 </a:solidFill>
                 <a:latin typeface="맑은 고딕"/>
               </a:rPr>
-              <a:t>•  `The standby chicago needs to be reinstated`</a:t>
+              <a:t>•  </a:t>
+            </a:r>
+            <a:r>
+              <a:rPr sz="1700" b="0">
+                <a:solidFill>
+                  <a:srgbClr val="222222"/>
+                </a:solidFill>
+                <a:latin typeface="Consolas"/>
+                <a:cs typeface="Consolas"/>
+              </a:rPr>
+              <a:t>The standby chicago needs to be reinstated</a:t>
             </a:r>
           </a:p>
           <a:p>
@@ -13321,7 +15256,36 @@
                 </a:solidFill>
                 <a:latin typeface="맑은 고딕"/>
               </a:rPr>
-              <a:t>•  `New primary is now ready to reinstate.` → `Issuing REINSTATE command.`</a:t>
+              <a:t>•  </a:t>
+            </a:r>
+            <a:r>
+              <a:rPr sz="1700" b="0">
+                <a:solidFill>
+                  <a:srgbClr val="222222"/>
+                </a:solidFill>
+                <a:latin typeface="Consolas"/>
+                <a:cs typeface="Consolas"/>
+              </a:rPr>
+              <a:t>New primary is now ready to reinstate.</a:t>
+            </a:r>
+            <a:r>
+              <a:rPr sz="1700" b="0">
+                <a:solidFill>
+                  <a:srgbClr val="222222"/>
+                </a:solidFill>
+                <a:latin typeface="맑은 고딕"/>
+              </a:rPr>
+              <a:t> → </a:t>
+            </a:r>
+            <a:r>
+              <a:rPr sz="1700" b="0">
+                <a:solidFill>
+                  <a:srgbClr val="222222"/>
+                </a:solidFill>
+                <a:latin typeface="Consolas"/>
+                <a:cs typeface="Consolas"/>
+              </a:rPr>
+              <a:t>Issuing REINSTATE command.</a:t>
             </a:r>
           </a:p>
           <a:p>
@@ -13337,7 +15301,26 @@
                 </a:solidFill>
                 <a:latin typeface="맑은 고딕"/>
               </a:rPr>
-              <a:t>•  재편입 직후에는 아직 **`MOUNTED`** — 적용 시작은 다음 단계</a:t>
+              <a:t>•  재편입 직후에는 아직 </a:t>
+            </a:r>
+            <a:r>
+              <a:rPr sz="1700" b="1">
+                <a:solidFill>
+                  <a:srgbClr val="222222"/>
+                </a:solidFill>
+                <a:latin typeface="Consolas"/>
+                <a:cs typeface="Consolas"/>
+              </a:rPr>
+              <a:t>MOUNTED</a:t>
+            </a:r>
+            <a:r>
+              <a:rPr sz="1700" b="0">
+                <a:solidFill>
+                  <a:srgbClr val="222222"/>
+                </a:solidFill>
+                <a:latin typeface="맑은 고딕"/>
+              </a:rPr>
+              <a:t> — 적용 시작은 다음 단계</a:t>
             </a:r>
           </a:p>
         </p:txBody>
@@ -13994,7 +15977,25 @@
                 </a:solidFill>
                 <a:latin typeface="맑은 고딕"/>
               </a:rPr>
-              <a:t>•  양쪽 **DBID 동일** (1852041610)</a:t>
+              <a:t>•  양쪽 </a:t>
+            </a:r>
+            <a:r>
+              <a:rPr sz="1700" b="1">
+                <a:solidFill>
+                  <a:srgbClr val="222222"/>
+                </a:solidFill>
+                <a:latin typeface="맑은 고딕"/>
+              </a:rPr>
+              <a:t>DBID 동일</a:t>
+            </a:r>
+            <a:r>
+              <a:rPr sz="1700" b="0">
+                <a:solidFill>
+                  <a:srgbClr val="222222"/>
+                </a:solidFill>
+                <a:latin typeface="맑은 고딕"/>
+              </a:rPr>
+              <a:t> (1852041610)</a:t>
             </a:r>
           </a:p>
           <a:p>
@@ -14010,7 +16011,36 @@
                 </a:solidFill>
                 <a:latin typeface="맑은 고딕"/>
               </a:rPr>
-              <a:t>•  `connected to target database: **CHICAGO**` — DB_NAME 이다</a:t>
+              <a:t>•  </a:t>
+            </a:r>
+            <a:r>
+              <a:rPr sz="1700" b="0">
+                <a:solidFill>
+                  <a:srgbClr val="222222"/>
+                </a:solidFill>
+                <a:latin typeface="Consolas"/>
+                <a:cs typeface="Consolas"/>
+              </a:rPr>
+              <a:t>connected to target database: </a:t>
+            </a:r>
+            <a:r>
+              <a:rPr sz="1700" b="1">
+                <a:solidFill>
+                  <a:srgbClr val="222222"/>
+                </a:solidFill>
+                <a:latin typeface="Consolas"/>
+                <a:cs typeface="Consolas"/>
+              </a:rPr>
+              <a:t>CHICAGO</a:t>
+            </a:r>
+            <a:r>
+              <a:rPr sz="1700" b="0">
+                <a:solidFill>
+                  <a:srgbClr val="222222"/>
+                </a:solidFill>
+                <a:latin typeface="맑은 고딕"/>
+              </a:rPr>
+              <a:t> — DB_NAME 이다</a:t>
             </a:r>
           </a:p>
           <a:p>
@@ -14026,7 +16056,16 @@
                 </a:solidFill>
                 <a:latin typeface="맑은 고딕"/>
               </a:rPr>
-              <a:t>•  실측 **2,820MB → 550MB, 57초**</a:t>
+              <a:t>•  실측 </a:t>
+            </a:r>
+            <a:r>
+              <a:rPr sz="1700" b="1">
+                <a:solidFill>
+                  <a:srgbClr val="222222"/>
+                </a:solidFill>
+                <a:latin typeface="맑은 고딕"/>
+              </a:rPr>
+              <a:t>2,820MB → 550MB, 57초</a:t>
             </a:r>
           </a:p>
           <a:p>
@@ -14042,7 +16081,26 @@
                 </a:solidFill>
                 <a:latin typeface="맑은 고딕"/>
               </a:rPr>
-              <a:t>•  아카이브까지 받으면 **`RMAN-06820`** 경고</a:t>
+              <a:t>•  아카이브까지 받으면 </a:t>
+            </a:r>
+            <a:r>
+              <a:rPr sz="1700" b="1">
+                <a:solidFill>
+                  <a:srgbClr val="222222"/>
+                </a:solidFill>
+                <a:latin typeface="Consolas"/>
+                <a:cs typeface="Consolas"/>
+              </a:rPr>
+              <a:t>RMAN-06820</a:t>
+            </a:r>
+            <a:r>
+              <a:rPr sz="1700" b="0">
+                <a:solidFill>
+                  <a:srgbClr val="222222"/>
+                </a:solidFill>
+                <a:latin typeface="맑은 고딕"/>
+              </a:rPr>
+              <a:t> 경고</a:t>
             </a:r>
           </a:p>
         </p:txBody>
@@ -14221,7 +16279,35 @@
                 </a:solidFill>
                 <a:latin typeface="맑은 고딕"/>
               </a:rPr>
-              <a:t>•  boston `list backup summary` → **11건**</a:t>
+              <a:t>•  boston </a:t>
+            </a:r>
+            <a:r>
+              <a:rPr sz="1700" b="0">
+                <a:solidFill>
+                  <a:srgbClr val="222222"/>
+                </a:solidFill>
+                <a:latin typeface="Consolas"/>
+                <a:cs typeface="Consolas"/>
+              </a:rPr>
+              <a:t>list backup summary</a:t>
+            </a:r>
+            <a:r>
+              <a:rPr sz="1700" b="0">
+                <a:solidFill>
+                  <a:srgbClr val="222222"/>
+                </a:solidFill>
+                <a:latin typeface="맑은 고딕"/>
+              </a:rPr>
+              <a:t> → </a:t>
+            </a:r>
+            <a:r>
+              <a:rPr sz="1700" b="1">
+                <a:solidFill>
+                  <a:srgbClr val="222222"/>
+                </a:solidFill>
+                <a:latin typeface="맑은 고딕"/>
+              </a:rPr>
+              <a:t>11건</a:t>
             </a:r>
           </a:p>
           <a:p>
@@ -14237,7 +16323,35 @@
                 </a:solidFill>
                 <a:latin typeface="맑은 고딕"/>
               </a:rPr>
-              <a:t>•  chicago `list backup summary` → **2건**</a:t>
+              <a:t>•  chicago </a:t>
+            </a:r>
+            <a:r>
+              <a:rPr sz="1700" b="0">
+                <a:solidFill>
+                  <a:srgbClr val="222222"/>
+                </a:solidFill>
+                <a:latin typeface="Consolas"/>
+                <a:cs typeface="Consolas"/>
+              </a:rPr>
+              <a:t>list backup summary</a:t>
+            </a:r>
+            <a:r>
+              <a:rPr sz="1700" b="0">
+                <a:solidFill>
+                  <a:srgbClr val="222222"/>
+                </a:solidFill>
+                <a:latin typeface="맑은 고딕"/>
+              </a:rPr>
+              <a:t> → </a:t>
+            </a:r>
+            <a:r>
+              <a:rPr sz="1700" b="1">
+                <a:solidFill>
+                  <a:srgbClr val="222222"/>
+                </a:solidFill>
+                <a:latin typeface="맑은 고딕"/>
+              </a:rPr>
+              <a:t>2건</a:t>
             </a:r>
           </a:p>
           <a:p>
@@ -14253,7 +16367,36 @@
                 </a:solidFill>
                 <a:latin typeface="맑은 고딕"/>
               </a:rPr>
-              <a:t>•  `V$RMAN_BACKUP_JOB_DETAILS` → **`no rows selected`**</a:t>
+              <a:t>•  </a:t>
+            </a:r>
+            <a:r>
+              <a:rPr sz="1700" b="0">
+                <a:solidFill>
+                  <a:srgbClr val="222222"/>
+                </a:solidFill>
+                <a:latin typeface="Consolas"/>
+                <a:cs typeface="Consolas"/>
+              </a:rPr>
+              <a:t>V$RMAN_BACKUP_JOB_DETAILS</a:t>
+            </a:r>
+            <a:r>
+              <a:rPr sz="1700" b="0">
+                <a:solidFill>
+                  <a:srgbClr val="222222"/>
+                </a:solidFill>
+                <a:latin typeface="맑은 고딕"/>
+              </a:rPr>
+              <a:t> → </a:t>
+            </a:r>
+            <a:r>
+              <a:rPr sz="1700" b="1">
+                <a:solidFill>
+                  <a:srgbClr val="222222"/>
+                </a:solidFill>
+                <a:latin typeface="Consolas"/>
+                <a:cs typeface="Consolas"/>
+              </a:rPr>
+              <a:t>no rows selected</a:t>
             </a:r>
           </a:p>
           <a:p>
@@ -14269,7 +16412,25 @@
                 </a:solidFill>
                 <a:latin typeface="맑은 고딕"/>
               </a:rPr>
-              <a:t>•  백업 이력은 **받은 쪽 컨트롤 파일에만** 있다</a:t>
+              <a:t>•  백업 이력은 </a:t>
+            </a:r>
+            <a:r>
+              <a:rPr sz="1700" b="1">
+                <a:solidFill>
+                  <a:srgbClr val="222222"/>
+                </a:solidFill>
+                <a:latin typeface="맑은 고딕"/>
+              </a:rPr>
+              <a:t>받은 쪽 컨트롤 파일에만</a:t>
+            </a:r>
+            <a:r>
+              <a:rPr sz="1700" b="0">
+                <a:solidFill>
+                  <a:srgbClr val="222222"/>
+                </a:solidFill>
+                <a:latin typeface="맑은 고딕"/>
+              </a:rPr>
+              <a:t> 있다</a:t>
             </a:r>
           </a:p>
         </p:txBody>
@@ -14448,7 +16609,35 @@
                 </a:solidFill>
                 <a:latin typeface="맑은 고딕"/>
               </a:rPr>
-              <a:t>•  **① 복구 카탈로그** — `configure db_unique_name 'boston' ...`</a:t>
+              <a:t>•  </a:t>
+            </a:r>
+            <a:r>
+              <a:rPr sz="1700" b="1">
+                <a:solidFill>
+                  <a:srgbClr val="222222"/>
+                </a:solidFill>
+                <a:latin typeface="맑은 고딕"/>
+              </a:rPr>
+              <a:t>① 복구 카탈로그</a:t>
+            </a:r>
+            <a:r>
+              <a:rPr sz="1700" b="0">
+                <a:solidFill>
+                  <a:srgbClr val="222222"/>
+                </a:solidFill>
+                <a:latin typeface="맑은 고딕"/>
+              </a:rPr>
+              <a:t> — </a:t>
+            </a:r>
+            <a:r>
+              <a:rPr sz="1700" b="0">
+                <a:solidFill>
+                  <a:srgbClr val="222222"/>
+                </a:solidFill>
+                <a:latin typeface="Consolas"/>
+                <a:cs typeface="Consolas"/>
+              </a:rPr>
+              <a:t>configure db_unique_name 'boston' ...</a:t>
             </a:r>
           </a:p>
           <a:p>
@@ -14464,7 +16653,35 @@
                 </a:solidFill>
                 <a:latin typeface="맑은 고딕"/>
               </a:rPr>
-              <a:t>•  **② 조각을 옮기고 등록** — `catalog start with '...' noprompt`</a:t>
+              <a:t>•  </a:t>
+            </a:r>
+            <a:r>
+              <a:rPr sz="1700" b="1">
+                <a:solidFill>
+                  <a:srgbClr val="222222"/>
+                </a:solidFill>
+                <a:latin typeface="맑은 고딕"/>
+              </a:rPr>
+              <a:t>② 조각을 옮기고 등록</a:t>
+            </a:r>
+            <a:r>
+              <a:rPr sz="1700" b="0">
+                <a:solidFill>
+                  <a:srgbClr val="222222"/>
+                </a:solidFill>
+                <a:latin typeface="맑은 고딕"/>
+              </a:rPr>
+              <a:t> — </a:t>
+            </a:r>
+            <a:r>
+              <a:rPr sz="1700" b="0">
+                <a:solidFill>
+                  <a:srgbClr val="222222"/>
+                </a:solidFill>
+                <a:latin typeface="Consolas"/>
+                <a:cs typeface="Consolas"/>
+              </a:rPr>
+              <a:t>catalog start with '...' noprompt</a:t>
             </a:r>
           </a:p>
           <a:p>
@@ -14480,7 +16697,26 @@
                 </a:solidFill>
                 <a:latin typeface="맑은 고딕"/>
               </a:rPr>
-              <a:t>•  등록하면 **`.../Chicago/users01.dbf`** 로 인식된다</a:t>
+              <a:t>•  등록하면 </a:t>
+            </a:r>
+            <a:r>
+              <a:rPr sz="1700" b="1">
+                <a:solidFill>
+                  <a:srgbClr val="222222"/>
+                </a:solidFill>
+                <a:latin typeface="Consolas"/>
+                <a:cs typeface="Consolas"/>
+              </a:rPr>
+              <a:t>.../Chicago/users01.dbf</a:t>
+            </a:r>
+            <a:r>
+              <a:rPr sz="1700" b="0">
+                <a:solidFill>
+                  <a:srgbClr val="222222"/>
+                </a:solidFill>
+                <a:latin typeface="맑은 고딕"/>
+              </a:rPr>
+              <a:t> 로 인식된다</a:t>
             </a:r>
           </a:p>
           <a:p>
@@ -14496,7 +16732,25 @@
                 </a:solidFill>
                 <a:latin typeface="맑은 고딕"/>
               </a:rPr>
-              <a:t>•  RMAN 은 이름이 아니라 **DBID + 파일 번호**로 판단한다</a:t>
+              <a:t>•  RMAN 은 이름이 아니라 </a:t>
+            </a:r>
+            <a:r>
+              <a:rPr sz="1700" b="1">
+                <a:solidFill>
+                  <a:srgbClr val="222222"/>
+                </a:solidFill>
+                <a:latin typeface="맑은 고딕"/>
+              </a:rPr>
+              <a:t>DBID + 파일 번호</a:t>
+            </a:r>
+            <a:r>
+              <a:rPr sz="1700" b="0">
+                <a:solidFill>
+                  <a:srgbClr val="222222"/>
+                </a:solidFill>
+                <a:latin typeface="맑은 고딕"/>
+              </a:rPr>
+              <a:t>로 판단한다</a:t>
             </a:r>
           </a:p>
         </p:txBody>
@@ -14636,7 +16890,34 @@
                 </a:solidFill>
                 <a:latin typeface="맑은 고딕"/>
               </a:rPr>
-              <a:t>•  Switchover 는 **무손실·되돌림 가능**, Failover 는 **손실 가능·Reinstate 필요**</a:t>
+              <a:t>•  Switchover 는 </a:t>
+            </a:r>
+            <a:r>
+              <a:rPr sz="1600" b="1">
+                <a:solidFill>
+                  <a:srgbClr val="222222"/>
+                </a:solidFill>
+                <a:latin typeface="맑은 고딕"/>
+              </a:rPr>
+              <a:t>무손실·되돌림 가능</a:t>
+            </a:r>
+            <a:r>
+              <a:rPr sz="1600" b="0">
+                <a:solidFill>
+                  <a:srgbClr val="222222"/>
+                </a:solidFill>
+                <a:latin typeface="맑은 고딕"/>
+              </a:rPr>
+              <a:t>, Failover 는 </a:t>
+            </a:r>
+            <a:r>
+              <a:rPr sz="1600" b="1">
+                <a:solidFill>
+                  <a:srgbClr val="222222"/>
+                </a:solidFill>
+                <a:latin typeface="맑은 고딕"/>
+              </a:rPr>
+              <a:t>손실 가능·Reinstate 필요</a:t>
             </a:r>
           </a:p>
           <a:p>
@@ -14652,7 +16933,64 @@
                 </a:solidFill>
                 <a:latin typeface="맑은 고딕"/>
               </a:rPr>
-              <a:t>•  `SWITCHOVER_STATUS` — Primary `TO STANDBY`, Standby `NOT ALLOWED`(정상)</a:t>
+              <a:t>•  </a:t>
+            </a:r>
+            <a:r>
+              <a:rPr sz="1600" b="0">
+                <a:solidFill>
+                  <a:srgbClr val="222222"/>
+                </a:solidFill>
+                <a:latin typeface="Consolas"/>
+                <a:cs typeface="Consolas"/>
+              </a:rPr>
+              <a:t>SWITCHOVER_STATUS</a:t>
+            </a:r>
+            <a:r>
+              <a:rPr sz="1600" b="0">
+                <a:solidFill>
+                  <a:srgbClr val="222222"/>
+                </a:solidFill>
+                <a:latin typeface="맑은 고딕"/>
+              </a:rPr>
+              <a:t> — Primary </a:t>
+            </a:r>
+            <a:r>
+              <a:rPr sz="1600" b="0">
+                <a:solidFill>
+                  <a:srgbClr val="222222"/>
+                </a:solidFill>
+                <a:latin typeface="Consolas"/>
+                <a:cs typeface="Consolas"/>
+              </a:rPr>
+              <a:t>TO STANDBY</a:t>
+            </a:r>
+            <a:r>
+              <a:rPr sz="1600" b="0">
+                <a:solidFill>
+                  <a:srgbClr val="222222"/>
+                </a:solidFill>
+                <a:latin typeface="맑은 고딕"/>
+              </a:rPr>
+              <a:t>, Standby </a:t>
+            </a:r>
+            <a:r>
+              <a:rPr sz="1600" b="0">
+                <a:solidFill>
+                  <a:srgbClr val="222222"/>
+                </a:solidFill>
+                <a:latin typeface="Consolas"/>
+                <a:cs typeface="Consolas"/>
+              </a:rPr>
+              <a:t>NOT ALLOWED</a:t>
+            </a:r>
+            <a:r>
+              <a:rPr sz="1600" b="0">
+                <a:solidFill>
+                  <a:srgbClr val="222222"/>
+                </a:solidFill>
+                <a:latin typeface="맑은 고딕"/>
+              </a:rPr>
+              <a:t>(정상)</a:t>
             </a:r>
           </a:p>
           <a:p>
@@ -14668,7 +17006,35 @@
                 </a:solidFill>
                 <a:latin typeface="맑은 고딕"/>
               </a:rPr>
-              <a:t>•  `Connected to an idle instance.` — **정적 등록이 여기서 쓰인다**</a:t>
+              <a:t>•  </a:t>
+            </a:r>
+            <a:r>
+              <a:rPr sz="1600" b="0">
+                <a:solidFill>
+                  <a:srgbClr val="222222"/>
+                </a:solidFill>
+                <a:latin typeface="Consolas"/>
+                <a:cs typeface="Consolas"/>
+              </a:rPr>
+              <a:t>Connected to an idle instance.</a:t>
+            </a:r>
+            <a:r>
+              <a:rPr sz="1600" b="0">
+                <a:solidFill>
+                  <a:srgbClr val="222222"/>
+                </a:solidFill>
+                <a:latin typeface="맑은 고딕"/>
+              </a:rPr>
+              <a:t> — </a:t>
+            </a:r>
+            <a:r>
+              <a:rPr sz="1600" b="1">
+                <a:solidFill>
+                  <a:srgbClr val="222222"/>
+                </a:solidFill>
+                <a:latin typeface="맑은 고딕"/>
+              </a:rPr>
+              <a:t>정적 등록이 여기서 쓰인다</a:t>
             </a:r>
           </a:p>
           <a:p>
@@ -14684,7 +17050,35 @@
                 </a:solidFill>
                 <a:latin typeface="맑은 고딕"/>
               </a:rPr>
-              <a:t>•  `Database opened.` — **Active Data Guard 가 전환 후에도 유지**</a:t>
+              <a:t>•  </a:t>
+            </a:r>
+            <a:r>
+              <a:rPr sz="1600" b="0">
+                <a:solidFill>
+                  <a:srgbClr val="222222"/>
+                </a:solidFill>
+                <a:latin typeface="Consolas"/>
+                <a:cs typeface="Consolas"/>
+              </a:rPr>
+              <a:t>Database opened.</a:t>
+            </a:r>
+            <a:r>
+              <a:rPr sz="1600" b="0">
+                <a:solidFill>
+                  <a:srgbClr val="222222"/>
+                </a:solidFill>
+                <a:latin typeface="맑은 고딕"/>
+              </a:rPr>
+              <a:t> — </a:t>
+            </a:r>
+            <a:r>
+              <a:rPr sz="1600" b="1">
+                <a:solidFill>
+                  <a:srgbClr val="222222"/>
+                </a:solidFill>
+                <a:latin typeface="맑은 고딕"/>
+              </a:rPr>
+              <a:t>Active Data Guard 가 전환 후에도 유지</a:t>
             </a:r>
           </a:p>
           <a:p>
@@ -14700,7 +17094,55 @@
                 </a:solidFill>
                 <a:latin typeface="맑은 고딕"/>
               </a:rPr>
-              <a:t>•  `DB_NAME` 은 양쪽 `CHICAGO`. 구별은 **`DB_UNIQUE_NAME`**</a:t>
+              <a:t>•  </a:t>
+            </a:r>
+            <a:r>
+              <a:rPr sz="1600" b="0">
+                <a:solidFill>
+                  <a:srgbClr val="222222"/>
+                </a:solidFill>
+                <a:latin typeface="Consolas"/>
+                <a:cs typeface="Consolas"/>
+              </a:rPr>
+              <a:t>DB_NAME</a:t>
+            </a:r>
+            <a:r>
+              <a:rPr sz="1600" b="0">
+                <a:solidFill>
+                  <a:srgbClr val="222222"/>
+                </a:solidFill>
+                <a:latin typeface="맑은 고딕"/>
+              </a:rPr>
+              <a:t> 은 양쪽 </a:t>
+            </a:r>
+            <a:r>
+              <a:rPr sz="1600" b="0">
+                <a:solidFill>
+                  <a:srgbClr val="222222"/>
+                </a:solidFill>
+                <a:latin typeface="Consolas"/>
+                <a:cs typeface="Consolas"/>
+              </a:rPr>
+              <a:t>CHICAGO</a:t>
+            </a:r>
+            <a:r>
+              <a:rPr sz="1600" b="0">
+                <a:solidFill>
+                  <a:srgbClr val="222222"/>
+                </a:solidFill>
+                <a:latin typeface="맑은 고딕"/>
+              </a:rPr>
+              <a:t>. 구별은 </a:t>
+            </a:r>
+            <a:r>
+              <a:rPr sz="1600" b="1">
+                <a:solidFill>
+                  <a:srgbClr val="222222"/>
+                </a:solidFill>
+                <a:latin typeface="Consolas"/>
+                <a:cs typeface="Consolas"/>
+              </a:rPr>
+              <a:t>DB_UNIQUE_NAME</a:t>
             </a:r>
           </a:p>
           <a:p>
@@ -14716,7 +17158,16 @@
                 </a:solidFill>
                 <a:latin typeface="맑은 고딕"/>
               </a:rPr>
-              <a:t>•  전환하면 Broker 가 목적지를 **반대 방향으로 다시 쓴다**</a:t>
+              <a:t>•  전환하면 Broker 가 목적지를 </a:t>
+            </a:r>
+            <a:r>
+              <a:rPr sz="1600" b="1">
+                <a:solidFill>
+                  <a:srgbClr val="222222"/>
+                </a:solidFill>
+                <a:latin typeface="맑은 고딕"/>
+              </a:rPr>
+              <a:t>반대 방향으로 다시 쓴다</a:t>
             </a:r>
           </a:p>
           <a:p>
@@ -14732,7 +17183,16 @@
                 </a:solidFill>
                 <a:latin typeface="맑은 고딕"/>
               </a:rPr>
-              <a:t>•  없는 멤버는 문장, 자기 자신은 **ORA-16558**</a:t>
+              <a:t>•  없는 멤버는 문장, 자기 자신은 </a:t>
+            </a:r>
+            <a:r>
+              <a:rPr sz="1600" b="1">
+                <a:solidFill>
+                  <a:srgbClr val="222222"/>
+                </a:solidFill>
+                <a:latin typeface="맑은 고딕"/>
+              </a:rPr>
+              <a:t>ORA-16558</a:t>
             </a:r>
           </a:p>
           <a:p>
@@ -14748,7 +17208,25 @@
                 </a:solidFill>
                 <a:latin typeface="맑은 고딕"/>
               </a:rPr>
-              <a:t>•  **★ SQL 전환은 거부되지 않는다.** 역할만 바뀌고 뒷정리가 없다</a:t>
+              <a:t>•  </a:t>
+            </a:r>
+            <a:r>
+              <a:rPr sz="1600" b="1">
+                <a:solidFill>
+                  <a:srgbClr val="222222"/>
+                </a:solidFill>
+                <a:latin typeface="맑은 고딕"/>
+              </a:rPr>
+              <a:t>★ SQL 전환은 거부되지 않는다.</a:t>
+            </a:r>
+            <a:r>
+              <a:rPr sz="1600" b="0">
+                <a:solidFill>
+                  <a:srgbClr val="222222"/>
+                </a:solidFill>
+                <a:latin typeface="맑은 고딕"/>
+              </a:rPr>
+              <a:t> 역할만 바뀌고 뒷정리가 없다</a:t>
             </a:r>
           </a:p>
           <a:p>
@@ -14764,7 +17242,92 @@
                 </a:solidFill>
                 <a:latin typeface="맑은 고딕"/>
               </a:rPr>
-              <a:t>•  그 결과 **ORA-16816**, 복구는 `REMOVE`→`CREATE`→`ADD`→`ENABLE`</a:t>
+              <a:t>•  그 결과 </a:t>
+            </a:r>
+            <a:r>
+              <a:rPr sz="1600" b="1">
+                <a:solidFill>
+                  <a:srgbClr val="222222"/>
+                </a:solidFill>
+                <a:latin typeface="맑은 고딕"/>
+              </a:rPr>
+              <a:t>ORA-16816</a:t>
+            </a:r>
+            <a:r>
+              <a:rPr sz="1600" b="0">
+                <a:solidFill>
+                  <a:srgbClr val="222222"/>
+                </a:solidFill>
+                <a:latin typeface="맑은 고딕"/>
+              </a:rPr>
+              <a:t>, 복구는 </a:t>
+            </a:r>
+            <a:r>
+              <a:rPr sz="1600" b="0">
+                <a:solidFill>
+                  <a:srgbClr val="222222"/>
+                </a:solidFill>
+                <a:latin typeface="Consolas"/>
+                <a:cs typeface="Consolas"/>
+              </a:rPr>
+              <a:t>REMOVE</a:t>
+            </a:r>
+            <a:r>
+              <a:rPr sz="1600" b="0">
+                <a:solidFill>
+                  <a:srgbClr val="222222"/>
+                </a:solidFill>
+                <a:latin typeface="맑은 고딕"/>
+              </a:rPr>
+              <a:t>→</a:t>
+            </a:r>
+            <a:r>
+              <a:rPr sz="1600" b="0">
+                <a:solidFill>
+                  <a:srgbClr val="222222"/>
+                </a:solidFill>
+                <a:latin typeface="Consolas"/>
+                <a:cs typeface="Consolas"/>
+              </a:rPr>
+              <a:t>CREATE</a:t>
+            </a:r>
+            <a:r>
+              <a:rPr sz="1600" b="0">
+                <a:solidFill>
+                  <a:srgbClr val="222222"/>
+                </a:solidFill>
+                <a:latin typeface="맑은 고딕"/>
+              </a:rPr>
+              <a:t>→</a:t>
+            </a:r>
+            <a:r>
+              <a:rPr sz="1600" b="0">
+                <a:solidFill>
+                  <a:srgbClr val="222222"/>
+                </a:solidFill>
+                <a:latin typeface="Consolas"/>
+                <a:cs typeface="Consolas"/>
+              </a:rPr>
+              <a:t>ADD</a:t>
+            </a:r>
+            <a:r>
+              <a:rPr sz="1600" b="0">
+                <a:solidFill>
+                  <a:srgbClr val="222222"/>
+                </a:solidFill>
+                <a:latin typeface="맑은 고딕"/>
+              </a:rPr>
+              <a:t>→</a:t>
+            </a:r>
+            <a:r>
+              <a:rPr sz="1600" b="0">
+                <a:solidFill>
+                  <a:srgbClr val="222222"/>
+                </a:solidFill>
+                <a:latin typeface="Consolas"/>
+                <a:cs typeface="Consolas"/>
+              </a:rPr>
+              <a:t>ENABLE</a:t>
             </a:r>
           </a:p>
           <a:p>
@@ -14780,7 +17343,16 @@
                 </a:solidFill>
                 <a:latin typeface="맑은 고딕"/>
               </a:rPr>
-              <a:t>•  플래시백은 열린 채로 켜진다. 이미 켜졌으면 **ORA-38706+38713**</a:t>
+              <a:t>•  플래시백은 열린 채로 켜진다. 이미 켜졌으면 </a:t>
+            </a:r>
+            <a:r>
+              <a:rPr sz="1600" b="1">
+                <a:solidFill>
+                  <a:srgbClr val="222222"/>
+                </a:solidFill>
+                <a:latin typeface="맑은 고딕"/>
+              </a:rPr>
+              <a:t>ORA-38706+38713</a:t>
             </a:r>
           </a:p>
           <a:p>
@@ -14796,7 +17368,45 @@
                 </a:solidFill>
                 <a:latin typeface="맑은 고딕"/>
               </a:rPr>
-              <a:t>•  Standby 는 **`Possible network disconnect`** 라고만 말한다 (`ERROR_CODE` 0)</a:t>
+              <a:t>•  Standby 는 </a:t>
+            </a:r>
+            <a:r>
+              <a:rPr sz="1600" b="1">
+                <a:solidFill>
+                  <a:srgbClr val="222222"/>
+                </a:solidFill>
+                <a:latin typeface="Consolas"/>
+                <a:cs typeface="Consolas"/>
+              </a:rPr>
+              <a:t>Possible network disconnect</a:t>
+            </a:r>
+            <a:r>
+              <a:rPr sz="1600" b="0">
+                <a:solidFill>
+                  <a:srgbClr val="222222"/>
+                </a:solidFill>
+                <a:latin typeface="맑은 고딕"/>
+              </a:rPr>
+              <a:t> 라고만 말한다 (</a:t>
+            </a:r>
+            <a:r>
+              <a:rPr sz="1600" b="0">
+                <a:solidFill>
+                  <a:srgbClr val="222222"/>
+                </a:solidFill>
+                <a:latin typeface="Consolas"/>
+                <a:cs typeface="Consolas"/>
+              </a:rPr>
+              <a:t>ERROR_CODE</a:t>
+            </a:r>
+            <a:r>
+              <a:rPr sz="1600" b="0">
+                <a:solidFill>
+                  <a:srgbClr val="222222"/>
+                </a:solidFill>
+                <a:latin typeface="맑은 고딕"/>
+              </a:rPr>
+              <a:t> 0)</a:t>
             </a:r>
           </a:p>
           <a:p>
@@ -14812,7 +17422,54 @@
                 </a:solidFill>
                 <a:latin typeface="맑은 고딕"/>
               </a:rPr>
-              <a:t>•  Failover 직후 `(disabled)` + **ORA-16661** 인데 상태는 **`SUCCESS`**</a:t>
+              <a:t>•  Failover 직후 </a:t>
+            </a:r>
+            <a:r>
+              <a:rPr sz="1600" b="0">
+                <a:solidFill>
+                  <a:srgbClr val="222222"/>
+                </a:solidFill>
+                <a:latin typeface="Consolas"/>
+                <a:cs typeface="Consolas"/>
+              </a:rPr>
+              <a:t>(disabled)</a:t>
+            </a:r>
+            <a:r>
+              <a:rPr sz="1600" b="0">
+                <a:solidFill>
+                  <a:srgbClr val="222222"/>
+                </a:solidFill>
+                <a:latin typeface="맑은 고딕"/>
+              </a:rPr>
+              <a:t> + </a:t>
+            </a:r>
+            <a:r>
+              <a:rPr sz="1600" b="1">
+                <a:solidFill>
+                  <a:srgbClr val="222222"/>
+                </a:solidFill>
+                <a:latin typeface="맑은 고딕"/>
+              </a:rPr>
+              <a:t>ORA-16661</a:t>
+            </a:r>
+            <a:r>
+              <a:rPr sz="1600" b="0">
+                <a:solidFill>
+                  <a:srgbClr val="222222"/>
+                </a:solidFill>
+                <a:latin typeface="맑은 고딕"/>
+              </a:rPr>
+              <a:t> 인데 상태는 </a:t>
+            </a:r>
+            <a:r>
+              <a:rPr sz="1600" b="1">
+                <a:solidFill>
+                  <a:srgbClr val="222222"/>
+                </a:solidFill>
+                <a:latin typeface="Consolas"/>
+                <a:cs typeface="Consolas"/>
+              </a:rPr>
+              <a:t>SUCCESS</a:t>
             </a:r>
           </a:p>
           <a:p>
@@ -14828,7 +17485,44 @@
                 </a:solidFill>
                 <a:latin typeface="맑은 고딕"/>
               </a:rPr>
-              <a:t>•  내려간 채로 Reinstate → **ORA-16653**. `MOUNT` 까지만 올린다</a:t>
+              <a:t>•  내려간 채로 Reinstate → </a:t>
+            </a:r>
+            <a:r>
+              <a:rPr sz="1600" b="1">
+                <a:solidFill>
+                  <a:srgbClr val="222222"/>
+                </a:solidFill>
+                <a:latin typeface="맑은 고딕"/>
+              </a:rPr>
+              <a:t>ORA-16653</a:t>
+            </a:r>
+            <a:r>
+              <a:rPr sz="1600" b="0">
+                <a:solidFill>
+                  <a:srgbClr val="222222"/>
+                </a:solidFill>
+                <a:latin typeface="맑은 고딕"/>
+              </a:rPr>
+              <a:t>. </a:t>
+            </a:r>
+            <a:r>
+              <a:rPr sz="1600" b="0">
+                <a:solidFill>
+                  <a:srgbClr val="222222"/>
+                </a:solidFill>
+                <a:latin typeface="Consolas"/>
+                <a:cs typeface="Consolas"/>
+              </a:rPr>
+              <a:t>MOUNT</a:t>
+            </a:r>
+            <a:r>
+              <a:rPr sz="1600" b="0">
+                <a:solidFill>
+                  <a:srgbClr val="222222"/>
+                </a:solidFill>
+                <a:latin typeface="맑은 고딕"/>
+              </a:rPr>
+              <a:t> 까지만 올린다</a:t>
             </a:r>
           </a:p>
           <a:p>
@@ -14844,7 +17538,35 @@
                 </a:solidFill>
                 <a:latin typeface="맑은 고딕"/>
               </a:rPr>
-              <a:t>•  Failover 는 `OPEN RESETLOGS` — 시퀀스가 **4로 다시 시작**</a:t>
+              <a:t>•  Failover 는 </a:t>
+            </a:r>
+            <a:r>
+              <a:rPr sz="1600" b="0">
+                <a:solidFill>
+                  <a:srgbClr val="222222"/>
+                </a:solidFill>
+                <a:latin typeface="Consolas"/>
+                <a:cs typeface="Consolas"/>
+              </a:rPr>
+              <a:t>OPEN RESETLOGS</a:t>
+            </a:r>
+            <a:r>
+              <a:rPr sz="1600" b="0">
+                <a:solidFill>
+                  <a:srgbClr val="222222"/>
+                </a:solidFill>
+                <a:latin typeface="맑은 고딕"/>
+              </a:rPr>
+              <a:t> — 시퀀스가 </a:t>
+            </a:r>
+            <a:r>
+              <a:rPr sz="1600" b="1">
+                <a:solidFill>
+                  <a:srgbClr val="222222"/>
+                </a:solidFill>
+                <a:latin typeface="맑은 고딕"/>
+              </a:rPr>
+              <a:t>4로 다시 시작</a:t>
             </a:r>
           </a:p>
           <a:p>
@@ -14860,7 +17582,54 @@
                 </a:solidFill>
                 <a:latin typeface="맑은 고딕"/>
               </a:rPr>
-              <a:t>•  전환 직후의 `ORA-16786`·`ORA-16854` 는 **판정 시차**</a:t>
+              <a:t>•  전환 직후의 </a:t>
+            </a:r>
+            <a:r>
+              <a:rPr sz="1600" b="0">
+                <a:solidFill>
+                  <a:srgbClr val="222222"/>
+                </a:solidFill>
+                <a:latin typeface="Consolas"/>
+                <a:cs typeface="Consolas"/>
+              </a:rPr>
+              <a:t>ORA-16786</a:t>
+            </a:r>
+            <a:r>
+              <a:rPr sz="1600" b="0">
+                <a:solidFill>
+                  <a:srgbClr val="222222"/>
+                </a:solidFill>
+                <a:latin typeface="맑은 고딕"/>
+              </a:rPr>
+              <a:t>·</a:t>
+            </a:r>
+            <a:r>
+              <a:rPr sz="1600" b="0">
+                <a:solidFill>
+                  <a:srgbClr val="222222"/>
+                </a:solidFill>
+                <a:latin typeface="Consolas"/>
+                <a:cs typeface="Consolas"/>
+              </a:rPr>
+              <a:t>ORA-16854</a:t>
+            </a:r>
+            <a:r>
+              <a:rPr sz="1600" b="0">
+                <a:solidFill>
+                  <a:srgbClr val="222222"/>
+                </a:solidFill>
+                <a:latin typeface="맑은 고딕"/>
+              </a:rPr>
+              <a:t> 는 </a:t>
+            </a:r>
+            <a:r>
+              <a:rPr sz="1600" b="1">
+                <a:solidFill>
+                  <a:srgbClr val="222222"/>
+                </a:solidFill>
+                <a:latin typeface="맑은 고딕"/>
+              </a:rPr>
+              <a:t>판정 시차</a:t>
             </a:r>
           </a:p>
           <a:p>
@@ -14876,7 +17645,34 @@
                 </a:solidFill>
                 <a:latin typeface="맑은 고딕"/>
               </a:rPr>
-              <a:t>•  관측자는 제3 호스트에서 돈다. 자동 전환 **69초**, 자동 재편입 **42초**</a:t>
+              <a:t>•  관측자는 제3 호스트에서 돈다. 자동 전환 </a:t>
+            </a:r>
+            <a:r>
+              <a:rPr sz="1600" b="1">
+                <a:solidFill>
+                  <a:srgbClr val="222222"/>
+                </a:solidFill>
+                <a:latin typeface="맑은 고딕"/>
+              </a:rPr>
+              <a:t>69초</a:t>
+            </a:r>
+            <a:r>
+              <a:rPr sz="1600" b="0">
+                <a:solidFill>
+                  <a:srgbClr val="222222"/>
+                </a:solidFill>
+                <a:latin typeface="맑은 고딕"/>
+              </a:rPr>
+              <a:t>, 자동 재편입 </a:t>
+            </a:r>
+            <a:r>
+              <a:rPr sz="1600" b="1">
+                <a:solidFill>
+                  <a:srgbClr val="222222"/>
+                </a:solidFill>
+                <a:latin typeface="맑은 고딕"/>
+              </a:rPr>
+              <a:t>42초</a:t>
             </a:r>
           </a:p>
           <a:p>
@@ -14892,7 +17688,25 @@
                 </a:solidFill>
                 <a:latin typeface="맑은 고딕"/>
               </a:rPr>
-              <a:t>•  관측자는 **"Standby 가 방금까지 Primary 와 연락했다"면 한 번 거부**한다</a:t>
+              <a:t>•  관측자는 </a:t>
+            </a:r>
+            <a:r>
+              <a:rPr sz="1600" b="1">
+                <a:solidFill>
+                  <a:srgbClr val="222222"/>
+                </a:solidFill>
+                <a:latin typeface="맑은 고딕"/>
+              </a:rPr>
+              <a:t>"Standby 가 방금까지 Primary 와 연락했다"면 한 번 거부</a:t>
+            </a:r>
+            <a:r>
+              <a:rPr sz="1600" b="0">
+                <a:solidFill>
+                  <a:srgbClr val="222222"/>
+                </a:solidFill>
+                <a:latin typeface="맑은 고딕"/>
+              </a:rPr>
+              <a:t>한다</a:t>
             </a:r>
           </a:p>
           <a:p>
@@ -14908,7 +17722,35 @@
                 </a:solidFill>
                 <a:latin typeface="맑은 고딕"/>
               </a:rPr>
-              <a:t>•  Standby 백업은 되지만 **Primary 에서는 보이지 않는다** — 카탈로그 또는 `CATALOG`</a:t>
+              <a:t>•  Standby 백업은 되지만 </a:t>
+            </a:r>
+            <a:r>
+              <a:rPr sz="1600" b="1">
+                <a:solidFill>
+                  <a:srgbClr val="222222"/>
+                </a:solidFill>
+                <a:latin typeface="맑은 고딕"/>
+              </a:rPr>
+              <a:t>Primary 에서는 보이지 않는다</a:t>
+            </a:r>
+            <a:r>
+              <a:rPr sz="1600" b="0">
+                <a:solidFill>
+                  <a:srgbClr val="222222"/>
+                </a:solidFill>
+                <a:latin typeface="맑은 고딕"/>
+              </a:rPr>
+              <a:t> — 카탈로그 또는 </a:t>
+            </a:r>
+            <a:r>
+              <a:rPr sz="1600" b="0">
+                <a:solidFill>
+                  <a:srgbClr val="222222"/>
+                </a:solidFill>
+                <a:latin typeface="Consolas"/>
+                <a:cs typeface="Consolas"/>
+              </a:rPr>
+              <a:t>CATALOG</a:t>
             </a:r>
           </a:p>
         </p:txBody>
@@ -15080,7 +17922,44 @@
                 </a:solidFill>
                 <a:latin typeface="맑은 고딕"/>
               </a:rPr>
-              <a:t>•  **① `SUCCESS` 를 안전으로 읽지 않는다** (14~16장에서 네 번)</a:t>
+              <a:t>•  </a:t>
+            </a:r>
+            <a:r>
+              <a:rPr sz="1600" b="1">
+                <a:solidFill>
+                  <a:srgbClr val="222222"/>
+                </a:solidFill>
+                <a:latin typeface="맑은 고딕"/>
+              </a:rPr>
+              <a:t>① </a:t>
+            </a:r>
+            <a:r>
+              <a:rPr sz="1600" b="1">
+                <a:solidFill>
+                  <a:srgbClr val="222222"/>
+                </a:solidFill>
+                <a:latin typeface="Consolas"/>
+                <a:cs typeface="Consolas"/>
+              </a:rPr>
+              <a:t>SUCCESS</a:t>
+            </a:r>
+            <a:r>
+              <a:rPr sz="1600" b="1">
+                <a:solidFill>
+                  <a:srgbClr val="222222"/>
+                </a:solidFill>
+                <a:latin typeface="맑은 고딕"/>
+              </a:rPr>
+              <a:t> 를 안전으로 읽지 않는다</a:t>
+            </a:r>
+            <a:r>
+              <a:rPr sz="1600" b="0">
+                <a:solidFill>
+                  <a:srgbClr val="222222"/>
+                </a:solidFill>
+                <a:latin typeface="맑은 고딕"/>
+              </a:rPr>
+              <a:t> (14~16장에서 네 번)</a:t>
             </a:r>
           </a:p>
           <a:p>
@@ -15096,7 +17975,25 @@
                 </a:solidFill>
                 <a:latin typeface="맑은 고딕"/>
               </a:rPr>
-              <a:t>•  **② 요약이 아니라 흐름을 본다** (15장의 주 지표)</a:t>
+              <a:t>•  </a:t>
+            </a:r>
+            <a:r>
+              <a:rPr sz="1600" b="1">
+                <a:solidFill>
+                  <a:srgbClr val="222222"/>
+                </a:solidFill>
+                <a:latin typeface="맑은 고딕"/>
+              </a:rPr>
+              <a:t>② 요약이 아니라 흐름을 본다</a:t>
+            </a:r>
+            <a:r>
+              <a:rPr sz="1600" b="0">
+                <a:solidFill>
+                  <a:srgbClr val="222222"/>
+                </a:solidFill>
+                <a:latin typeface="맑은 고딕"/>
+              </a:rPr>
+              <a:t> (15장의 주 지표)</a:t>
             </a:r>
           </a:p>
           <a:p>
@@ -15112,7 +18009,25 @@
                 </a:solidFill>
                 <a:latin typeface="맑은 고딕"/>
               </a:rPr>
-              <a:t>•  **③ 전환은 DGMGRL 로만 한다** (16장의 사고)</a:t>
+              <a:t>•  </a:t>
+            </a:r>
+            <a:r>
+              <a:rPr sz="1600" b="1">
+                <a:solidFill>
+                  <a:srgbClr val="222222"/>
+                </a:solidFill>
+                <a:latin typeface="맑은 고딕"/>
+              </a:rPr>
+              <a:t>③ 전환은 DGMGRL 로만 한다</a:t>
+            </a:r>
+            <a:r>
+              <a:rPr sz="1600" b="0">
+                <a:solidFill>
+                  <a:srgbClr val="222222"/>
+                </a:solidFill>
+                <a:latin typeface="맑은 고딕"/>
+              </a:rPr>
+              <a:t> (16장의 사고)</a:t>
             </a:r>
           </a:p>
           <a:p>
@@ -15128,7 +18043,16 @@
                 </a:solidFill>
                 <a:latin typeface="맑은 고딕"/>
               </a:rPr>
-              <a:t>•  그리고 — **되돌리는 것까지가 훈련이다**</a:t>
+              <a:t>•  그리고 — </a:t>
+            </a:r>
+            <a:r>
+              <a:rPr sz="1600" b="1">
+                <a:solidFill>
+                  <a:srgbClr val="222222"/>
+                </a:solidFill>
+                <a:latin typeface="맑은 고딕"/>
+              </a:rPr>
+              <a:t>되돌리는 것까지가 훈련이다</a:t>
             </a:r>
           </a:p>
         </p:txBody>
@@ -15307,7 +18231,34 @@
                 </a:solidFill>
                 <a:latin typeface="맑은 고딕"/>
               </a:rPr>
-              <a:t>•  언제 — **계획된 작업** / **재해**</a:t>
+              <a:t>•  언제 — </a:t>
+            </a:r>
+            <a:r>
+              <a:rPr sz="1700" b="1">
+                <a:solidFill>
+                  <a:srgbClr val="222222"/>
+                </a:solidFill>
+                <a:latin typeface="맑은 고딕"/>
+              </a:rPr>
+              <a:t>계획된 작업</a:t>
+            </a:r>
+            <a:r>
+              <a:rPr sz="1700" b="0">
+                <a:solidFill>
+                  <a:srgbClr val="222222"/>
+                </a:solidFill>
+                <a:latin typeface="맑은 고딕"/>
+              </a:rPr>
+              <a:t> / </a:t>
+            </a:r>
+            <a:r>
+              <a:rPr sz="1700" b="1">
+                <a:solidFill>
+                  <a:srgbClr val="222222"/>
+                </a:solidFill>
+                <a:latin typeface="맑은 고딕"/>
+              </a:rPr>
+              <a:t>재해</a:t>
             </a:r>
           </a:p>
           <a:p>
@@ -15323,7 +18274,34 @@
                 </a:solidFill>
                 <a:latin typeface="맑은 고딕"/>
               </a:rPr>
-              <a:t>•  데이터 손실 — **없다** / **있을 수 있다**</a:t>
+              <a:t>•  데이터 손실 — </a:t>
+            </a:r>
+            <a:r>
+              <a:rPr sz="1700" b="1">
+                <a:solidFill>
+                  <a:srgbClr val="222222"/>
+                </a:solidFill>
+                <a:latin typeface="맑은 고딕"/>
+              </a:rPr>
+              <a:t>없다</a:t>
+            </a:r>
+            <a:r>
+              <a:rPr sz="1700" b="0">
+                <a:solidFill>
+                  <a:srgbClr val="222222"/>
+                </a:solidFill>
+                <a:latin typeface="맑은 고딕"/>
+              </a:rPr>
+              <a:t> / </a:t>
+            </a:r>
+            <a:r>
+              <a:rPr sz="1700" b="1">
+                <a:solidFill>
+                  <a:srgbClr val="222222"/>
+                </a:solidFill>
+                <a:latin typeface="맑은 고딕"/>
+              </a:rPr>
+              <a:t>있을 수 있다</a:t>
             </a:r>
           </a:p>
           <a:p>
@@ -15339,7 +18317,16 @@
                 </a:solidFill>
                 <a:latin typeface="맑은 고딕"/>
               </a:rPr>
-              <a:t>•  옛 Primary — 그대로 Standby / **Reinstate 필요**</a:t>
+              <a:t>•  옛 Primary — 그대로 Standby / </a:t>
+            </a:r>
+            <a:r>
+              <a:rPr sz="1700" b="1">
+                <a:solidFill>
+                  <a:srgbClr val="222222"/>
+                </a:solidFill>
+                <a:latin typeface="맑은 고딕"/>
+              </a:rPr>
+              <a:t>Reinstate 필요</a:t>
             </a:r>
           </a:p>
           <a:p>
@@ -15371,7 +18358,34 @@
                 </a:solidFill>
                 <a:latin typeface="맑은 고딕"/>
               </a:rPr>
-              <a:t>•  실측 소요 — **64초** / **24초**</a:t>
+              <a:t>•  실측 소요 — </a:t>
+            </a:r>
+            <a:r>
+              <a:rPr sz="1700" b="1">
+                <a:solidFill>
+                  <a:srgbClr val="222222"/>
+                </a:solidFill>
+                <a:latin typeface="맑은 고딕"/>
+              </a:rPr>
+              <a:t>64초</a:t>
+            </a:r>
+            <a:r>
+              <a:rPr sz="1700" b="0">
+                <a:solidFill>
+                  <a:srgbClr val="222222"/>
+                </a:solidFill>
+                <a:latin typeface="맑은 고딕"/>
+              </a:rPr>
+              <a:t> / </a:t>
+            </a:r>
+            <a:r>
+              <a:rPr sz="1700" b="1">
+                <a:solidFill>
+                  <a:srgbClr val="222222"/>
+                </a:solidFill>
+                <a:latin typeface="맑은 고딕"/>
+              </a:rPr>
+              <a:t>24초</a:t>
             </a:r>
           </a:p>
         </p:txBody>
@@ -15566,7 +18580,25 @@
                 </a:solidFill>
                 <a:latin typeface="맑은 고딕"/>
               </a:rPr>
-              <a:t>•  Failover 는 훈련하기 어렵고 **흔적이 남는다**(RESETLOGS)</a:t>
+              <a:t>•  Failover 는 훈련하기 어렵고 </a:t>
+            </a:r>
+            <a:r>
+              <a:rPr sz="1700" b="1">
+                <a:solidFill>
+                  <a:srgbClr val="222222"/>
+                </a:solidFill>
+                <a:latin typeface="맑은 고딕"/>
+              </a:rPr>
+              <a:t>흔적이 남는다</a:t>
+            </a:r>
+            <a:r>
+              <a:rPr sz="1700" b="0">
+                <a:solidFill>
+                  <a:srgbClr val="222222"/>
+                </a:solidFill>
+                <a:latin typeface="맑은 고딕"/>
+              </a:rPr>
+              <a:t>(RESETLOGS)</a:t>
             </a:r>
           </a:p>
           <a:p>
@@ -15582,7 +18614,16 @@
                 </a:solidFill>
                 <a:latin typeface="맑은 고딕"/>
               </a:rPr>
-              <a:t>•  실측 왕복 **64초 + 69초**</a:t>
+              <a:t>•  실측 왕복 </a:t>
+            </a:r>
+            <a:r>
+              <a:rPr sz="1700" b="1">
+                <a:solidFill>
+                  <a:srgbClr val="222222"/>
+                </a:solidFill>
+                <a:latin typeface="맑은 고딕"/>
+              </a:rPr>
+              <a:t>64초 + 69초</a:t>
             </a:r>
           </a:p>
           <a:p>
@@ -15598,7 +18639,16 @@
                 </a:solidFill>
                 <a:latin typeface="맑은 고딕"/>
               </a:rPr>
-              <a:t>•  **시험해 보지 않은 전환은 없는 것과 같다**</a:t>
+              <a:t>•  </a:t>
+            </a:r>
+            <a:r>
+              <a:rPr sz="1700" b="1">
+                <a:solidFill>
+                  <a:srgbClr val="222222"/>
+                </a:solidFill>
+                <a:latin typeface="맑은 고딕"/>
+              </a:rPr>
+              <a:t>시험해 보지 않은 전환은 없는 것과 같다</a:t>
             </a:r>
           </a:p>
         </p:txBody>
@@ -16016,7 +19066,17 @@
                 </a:solidFill>
                 <a:latin typeface="맑은 고딕"/>
               </a:rPr>
-              <a:t>•  Primary — **`TO STANDBY`**</a:t>
+              <a:t>•  Primary — </a:t>
+            </a:r>
+            <a:r>
+              <a:rPr sz="1700" b="1">
+                <a:solidFill>
+                  <a:srgbClr val="222222"/>
+                </a:solidFill>
+                <a:latin typeface="Consolas"/>
+                <a:cs typeface="Consolas"/>
+              </a:rPr>
+              <a:t>TO STANDBY</a:t>
             </a:r>
           </a:p>
           <a:p>
@@ -16032,7 +19092,17 @@
                 </a:solidFill>
                 <a:latin typeface="맑은 고딕"/>
               </a:rPr>
-              <a:t>•  Standby — **`NOT ALLOWED`**</a:t>
+              <a:t>•  Standby — </a:t>
+            </a:r>
+            <a:r>
+              <a:rPr sz="1700" b="1">
+                <a:solidFill>
+                  <a:srgbClr val="222222"/>
+                </a:solidFill>
+                <a:latin typeface="Consolas"/>
+                <a:cs typeface="Consolas"/>
+              </a:rPr>
+              <a:t>NOT ALLOWED</a:t>
             </a:r>
           </a:p>
           <a:p>
@@ -16048,7 +19118,26 @@
                 </a:solidFill>
                 <a:latin typeface="맑은 고딕"/>
               </a:rPr>
-              <a:t>•  `SESSIONS ACTIVE` — 활성 세션이 있다</a:t>
+              <a:t>•  </a:t>
+            </a:r>
+            <a:r>
+              <a:rPr sz="1700" b="0">
+                <a:solidFill>
+                  <a:srgbClr val="222222"/>
+                </a:solidFill>
+                <a:latin typeface="Consolas"/>
+                <a:cs typeface="Consolas"/>
+              </a:rPr>
+              <a:t>SESSIONS ACTIVE</a:t>
+            </a:r>
+            <a:r>
+              <a:rPr sz="1700" b="0">
+                <a:solidFill>
+                  <a:srgbClr val="222222"/>
+                </a:solidFill>
+                <a:latin typeface="맑은 고딕"/>
+              </a:rPr>
+              <a:t> — 활성 세션이 있다</a:t>
             </a:r>
           </a:p>
           <a:p>
@@ -16064,7 +19153,26 @@
                 </a:solidFill>
                 <a:latin typeface="맑은 고딕"/>
               </a:rPr>
-              <a:t>•  `RECOVERY NEEDED` — 적용이 덜 됐다</a:t>
+              <a:t>•  </a:t>
+            </a:r>
+            <a:r>
+              <a:rPr sz="1700" b="0">
+                <a:solidFill>
+                  <a:srgbClr val="222222"/>
+                </a:solidFill>
+                <a:latin typeface="Consolas"/>
+                <a:cs typeface="Consolas"/>
+              </a:rPr>
+              <a:t>RECOVERY NEEDED</a:t>
+            </a:r>
+            <a:r>
+              <a:rPr sz="1700" b="0">
+                <a:solidFill>
+                  <a:srgbClr val="222222"/>
+                </a:solidFill>
+                <a:latin typeface="맑은 고딕"/>
+              </a:rPr>
+              <a:t> — 적용이 덜 됐다</a:t>
             </a:r>
           </a:p>
         </p:txBody>
@@ -16243,7 +19351,36 @@
                 </a:solidFill>
                 <a:latin typeface="맑은 고딕"/>
               </a:rPr>
-              <a:t>•  `V$DATABASE.NAME` — 양쪽 모두 **`CHICAGO`**</a:t>
+              <a:t>•  </a:t>
+            </a:r>
+            <a:r>
+              <a:rPr sz="1700" b="0">
+                <a:solidFill>
+                  <a:srgbClr val="222222"/>
+                </a:solidFill>
+                <a:latin typeface="Consolas"/>
+                <a:cs typeface="Consolas"/>
+              </a:rPr>
+              <a:t>V$DATABASE.NAME</a:t>
+            </a:r>
+            <a:r>
+              <a:rPr sz="1700" b="0">
+                <a:solidFill>
+                  <a:srgbClr val="222222"/>
+                </a:solidFill>
+                <a:latin typeface="맑은 고딕"/>
+              </a:rPr>
+              <a:t> — 양쪽 모두 </a:t>
+            </a:r>
+            <a:r>
+              <a:rPr sz="1700" b="1">
+                <a:solidFill>
+                  <a:srgbClr val="222222"/>
+                </a:solidFill>
+                <a:latin typeface="Consolas"/>
+                <a:cs typeface="Consolas"/>
+              </a:rPr>
+              <a:t>CHICAGO</a:t>
             </a:r>
           </a:p>
           <a:p>
@@ -16259,7 +19396,64 @@
                 </a:solidFill>
                 <a:latin typeface="맑은 고딕"/>
               </a:rPr>
-              <a:t>•  구별은 **`DB_UNIQUE_NAME`** (`chicago` / `boston`)</a:t>
+              <a:t>•  구별은 </a:t>
+            </a:r>
+            <a:r>
+              <a:rPr sz="1700" b="1">
+                <a:solidFill>
+                  <a:srgbClr val="222222"/>
+                </a:solidFill>
+                <a:latin typeface="Consolas"/>
+                <a:cs typeface="Consolas"/>
+              </a:rPr>
+              <a:t>DB_UNIQUE_NAME</a:t>
+            </a:r>
+            <a:r>
+              <a:rPr sz="1700" b="0">
+                <a:solidFill>
+                  <a:srgbClr val="222222"/>
+                </a:solidFill>
+                <a:latin typeface="맑은 고딕"/>
+              </a:rPr>
+              <a:t> (</a:t>
+            </a:r>
+            <a:r>
+              <a:rPr sz="1700" b="0">
+                <a:solidFill>
+                  <a:srgbClr val="222222"/>
+                </a:solidFill>
+                <a:latin typeface="Consolas"/>
+                <a:cs typeface="Consolas"/>
+              </a:rPr>
+              <a:t>chicago</a:t>
+            </a:r>
+            <a:r>
+              <a:rPr sz="1700" b="0">
+                <a:solidFill>
+                  <a:srgbClr val="222222"/>
+                </a:solidFill>
+                <a:latin typeface="맑은 고딕"/>
+              </a:rPr>
+              <a:t> / </a:t>
+            </a:r>
+            <a:r>
+              <a:rPr sz="1700" b="0">
+                <a:solidFill>
+                  <a:srgbClr val="222222"/>
+                </a:solidFill>
+                <a:latin typeface="Consolas"/>
+                <a:cs typeface="Consolas"/>
+              </a:rPr>
+              <a:t>boston</a:t>
+            </a:r>
+            <a:r>
+              <a:rPr sz="1700" b="0">
+                <a:solidFill>
+                  <a:srgbClr val="222222"/>
+                </a:solidFill>
+                <a:latin typeface="맑은 고딕"/>
+              </a:rPr>
+              <a:t>)</a:t>
             </a:r>
           </a:p>
           <a:p>
@@ -16291,7 +19485,26 @@
                 </a:solidFill>
                 <a:latin typeface="맑은 고딕"/>
               </a:rPr>
-              <a:t>•  **`NAME` 으로 판단하면 안 된다**</a:t>
+              <a:t>•  </a:t>
+            </a:r>
+            <a:r>
+              <a:rPr sz="1700" b="1">
+                <a:solidFill>
+                  <a:srgbClr val="222222"/>
+                </a:solidFill>
+                <a:latin typeface="Consolas"/>
+                <a:cs typeface="Consolas"/>
+              </a:rPr>
+              <a:t>NAME</a:t>
+            </a:r>
+            <a:r>
+              <a:rPr sz="1700" b="1">
+                <a:solidFill>
+                  <a:srgbClr val="222222"/>
+                </a:solidFill>
+                <a:latin typeface="맑은 고딕"/>
+              </a:rPr>
+              <a:t> 으로 판단하면 안 된다</a:t>
             </a:r>
           </a:p>
         </p:txBody>
